--- a/outputs/R.T._moa_risques_reglementaire.pptx
+++ b/outputs/R.T._moa_risques_reglementaire.pptx
@@ -3636,7 +3636,7 @@
                 </a:solidFill>
                 <a:latin typeface="Alegreya Sans"/>
               </a:rPr>
-              <a:t>EXPÉRIENCE PROFESSIONNELLE</a:t>
+              <a:t>PRINCIPALES EXPÉRIENCES PROFESSIONNELLES</a:t>
             </a:r>
           </a:p>
           <a:p>
@@ -4632,7 +4632,7 @@
                 </a:solidFill>
                 <a:latin typeface="Alegreya Sans"/>
               </a:rPr>
-              <a:t>PROFESSIONAL EXPERIENCE</a:t>
+              <a:t>MAIN PROFESSIONAL EXPERIENCE</a:t>
             </a:r>
           </a:p>
           <a:p>

--- a/outputs/R.T._moa_risques_reglementaire.pptx
+++ b/outputs/R.T._moa_risques_reglementaire.pptx
@@ -7,6 +7,9 @@
   <p:sldIdLst>
     <p:sldId id="256" r:id="rId7"/>
     <p:sldId id="257" r:id="rId8"/>
+    <p:sldId id="258" r:id="rId9"/>
+    <p:sldId id="259" r:id="rId10"/>
+    <p:sldId id="260" r:id="rId11"/>
   </p:sldIdLst>
   <p:sldSz cx="12192000" cy="6858000" type="screen4x3"/>
   <p:notesSz cx="6858000" cy="9144000"/>
@@ -3361,7 +3364,7 @@
                 </a:solidFill>
                 <a:latin typeface="Alegreya Sans"/>
               </a:rPr>
-              <a:t>Réglementation : Bâle IV, CRR III, Stress Tests, NDOD, Pilier 3 ESG</a:t>
+              <a:t>Réglementation financière : Bâle IV, CRR III, Stress Tests, NDOD, Taxonomie, Pilier 3 ESG</a:t>
             </a:r>
           </a:p>
           <a:p>
@@ -3436,7 +3439,7 @@
                 </a:solidFill>
                 <a:latin typeface="Alegreya Sans"/>
               </a:rPr>
-              <a:t>Chef de projet &amp; MOA (besoins, spécifications, recette)</a:t>
+              <a:t>Chef de projet / gestion de projet</a:t>
             </a:r>
           </a:p>
           <a:p>
@@ -3461,7 +3464,32 @@
                 </a:solidFill>
                 <a:latin typeface="Alegreya Sans"/>
               </a:rPr>
-              <a:t>Outils : SQL, VBA, Power BI, JIRA</a:t>
+              <a:t>MOA : expression de besoin, spécifications fonctionnelles, recette</a:t>
+            </a:r>
+          </a:p>
+          <a:p>
+            <a:pPr algn="l">
+              <a:spcAft>
+                <a:spcPts val="100"/>
+              </a:spcAft>
+            </a:pPr>
+            <a:r>
+              <a:rPr sz="1200" b="1" i="0">
+                <a:solidFill>
+                  <a:srgbClr val="3AEDE5"/>
+                </a:solidFill>
+                <a:latin typeface="Alegreya Sans"/>
+              </a:rPr>
+              <a:t>•  </a:t>
+            </a:r>
+            <a:r>
+              <a:rPr sz="1200" b="0" i="0">
+                <a:solidFill>
+                  <a:srgbClr val="FFFFFF"/>
+                </a:solidFill>
+                <a:latin typeface="Alegreya Sans"/>
+              </a:rPr>
+              <a:t>Outils : MS Office, VBA, SQL, Power BI, JIRA</a:t>
             </a:r>
           </a:p>
           <a:p>
@@ -3533,12 +3561,35 @@
             <a:r>
               <a:rPr sz="1200" b="1" i="0">
                 <a:solidFill>
-                  <a:srgbClr val="3AEDE5"/>
-                </a:solidFill>
-                <a:latin typeface="Alegreya Sans"/>
-              </a:rPr>
-              <a:t>—  </a:t>
-            </a:r>
+                  <a:srgbClr val="FFFFFF"/>
+                </a:solidFill>
+                <a:latin typeface="Alegreya Sans"/>
+              </a:rPr>
+              <a:t>Spécialisation</a:t>
+            </a:r>
+          </a:p>
+          <a:p>
+            <a:pPr algn="l">
+              <a:spcAft>
+                <a:spcPts val="300"/>
+              </a:spcAft>
+            </a:pPr>
+            <a:r>
+              <a:rPr sz="1200" b="0" i="1">
+                <a:solidFill>
+                  <a:srgbClr val="CCD6E8"/>
+                </a:solidFill>
+                <a:latin typeface="Alegreya Sans"/>
+              </a:rPr>
+              <a:t>Risques de crédit, de marché et opérationnels, modélisation financière, gestion d'actifs et gestion bancaire</a:t>
+            </a:r>
+          </a:p>
+          <a:p>
+            <a:pPr algn="l">
+              <a:spcAft>
+                <a:spcPts val="100"/>
+              </a:spcAft>
+            </a:pPr>
             <a:r>
               <a:rPr sz="1200" b="1" i="0">
                 <a:solidFill>
@@ -3617,7 +3668,7 @@
                 </a:solidFill>
                 <a:latin typeface="Alegreya Sans"/>
               </a:rPr>
-              <a:t>9 ans en conduite de projets de transformation, gestion des risques et conformité réglementaire pour les établissements financiers. Intervient à l'interface métiers / IT : risque de crédit, qualité des données, évolutions réglementaires.</a:t>
+              <a:t>9 ans d'expérience dans la conduite de projets de transformation, de gestion des risques et de conformité réglementaire pour les établissements financiers. Intervient à l'interface entre les métiers et les équipes IT sur des programmes complexes liés au risque de crédit, à la qualité des données, aux évolutions réglementaires et au pilotage de projets SI. Une expérience acquise auprès d'acteurs majeurs du secteur, combinant expertise métier, maîtrise des enjeux réglementaires et solides compétences en gestion de projet MOA.</a:t>
             </a:r>
           </a:p>
           <a:p>
@@ -3661,7 +3712,7 @@
                 </a:solidFill>
                 <a:latin typeface="Alegreya Sans"/>
               </a:rPr>
-              <a:t>Crédit Agricole Leasing &amp; Factoring</a:t>
+              <a:t>Crédit Agricole Leasing &amp; Factoring — DSID Risques Leasing</a:t>
             </a:r>
             <a:r>
               <a:rPr sz="1200" b="0" i="0">
@@ -3670,7 +3721,7 @@
                 </a:solidFill>
                 <a:latin typeface="Alegreya Sans"/>
               </a:rPr>
-              <a:t> — Chef de projets MOA — Risques Leasing (Karat Advisory)</a:t>
+              <a:t> — Chef de projets MOA (Karat Advisory)</a:t>
             </a:r>
             <a:r>
               <a:rPr sz="1200" b="0" i="1">
@@ -3704,7 +3755,7 @@
                 </a:solidFill>
                 <a:latin typeface="Alegreya Sans"/>
               </a:rPr>
-              <a:t>Pilotage de projets SI du cadrage à la mise en production : besoins métiers, impacts, spécifications, plans de tests, feuille de route MEP.</a:t>
+              <a:t>Pilotage de projets fonctionnels SI de la phase de cadrage jusqu'à la mise en production.</a:t>
             </a:r>
           </a:p>
           <a:p>
@@ -3729,11 +3780,11 @@
                 </a:solidFill>
                 <a:latin typeface="Alegreya Sans"/>
               </a:rPr>
-              <a:t>Coordination avec la MOE, maintien en condition opérationnelle, animation des comités et ateliers métiers, conduite du changement.</a:t>
-            </a:r>
-          </a:p>
-          <a:p>
-            <a:pPr algn="l">
+              <a:t>Recueil et analyse des besoins métiers, réalisation d'une évaluation d'impact et de faisabilité en fonction des contraintes.</a:t>
+            </a:r>
+          </a:p>
+          <a:p>
+            <a:pPr algn="l" lvl="1">
               <a:spcAft>
                 <a:spcPts val="100"/>
               </a:spcAft>
@@ -3745,16 +3796,7 @@
                 </a:solidFill>
                 <a:latin typeface="Alegreya Sans"/>
               </a:rPr>
-              <a:t>▸ </a:t>
-            </a:r>
-            <a:r>
-              <a:rPr sz="1200" b="1" i="0">
-                <a:solidFill>
-                  <a:srgbClr val="FFFFFF"/>
-                </a:solidFill>
-                <a:latin typeface="Alegreya Sans"/>
-              </a:rPr>
-              <a:t>BNP Paribas — BCBS 239</a:t>
+              <a:t>•  </a:t>
             </a:r>
             <a:r>
               <a:rPr sz="1200" b="0" i="0">
@@ -3763,16 +3805,7 @@
                 </a:solidFill>
                 <a:latin typeface="Alegreya Sans"/>
               </a:rPr>
-              <a:t> — Qualité des données Risques (EY)</a:t>
-            </a:r>
-            <a:r>
-              <a:rPr sz="1200" b="0" i="1">
-                <a:solidFill>
-                  <a:srgbClr val="3AEDE5"/>
-                </a:solidFill>
-                <a:latin typeface="Alegreya Sans"/>
-              </a:rPr>
-              <a:t>  (22 mois)</a:t>
+              <a:t>Production des livrables MOA : spécifications fonctionnelles, stratégies et plans de tests, feuille de route de mise en production.</a:t>
             </a:r>
           </a:p>
           <a:p>
@@ -3797,7 +3830,7 @@
                 </a:solidFill>
                 <a:latin typeface="Alegreya Sans"/>
               </a:rPr>
-              <a:t>Dispositif qualité des données des modèles de notation (Risk Drivers, scoping) : contrôles techniques et opérationnels, remédiation, tableaux de bord.</a:t>
+              <a:t>Suivi des évolutions applicatives et coordination avec la MOE.</a:t>
             </a:r>
           </a:p>
           <a:p>
@@ -3822,11 +3855,11 @@
                 </a:solidFill>
                 <a:latin typeface="Alegreya Sans"/>
               </a:rPr>
-              <a:t>Évaluation de la conformité Groupe aux principes BCBS 239, réponses aux recommandations BCE, documentation ICAAP (agrégation des données Risques).</a:t>
-            </a:r>
-          </a:p>
-          <a:p>
-            <a:pPr algn="l">
+              <a:t>Contribution au maintien en condition opérationnelle des applications (support fonctionnel, suivi des incidents, maintenance évolutive).</a:t>
+            </a:r>
+          </a:p>
+          <a:p>
+            <a:pPr algn="l" lvl="1">
               <a:spcAft>
                 <a:spcPts val="100"/>
               </a:spcAft>
@@ -3838,16 +3871,7 @@
                 </a:solidFill>
                 <a:latin typeface="Alegreya Sans"/>
               </a:rPr>
-              <a:t>▸ </a:t>
-            </a:r>
-            <a:r>
-              <a:rPr sz="1200" b="1" i="0">
-                <a:solidFill>
-                  <a:srgbClr val="FFFFFF"/>
-                </a:solidFill>
-                <a:latin typeface="Alegreya Sans"/>
-              </a:rPr>
-              <a:t>Dexia — CRR II / EBA 3.0 &amp; Stress Tests EBA</a:t>
+              <a:t>•  </a:t>
             </a:r>
             <a:r>
               <a:rPr sz="1200" b="0" i="0">
@@ -3856,134 +3880,7 @@
                 </a:solidFill>
                 <a:latin typeface="Alegreya Sans"/>
               </a:rPr>
-              <a:t> — Chef de projet (EY)</a:t>
-            </a:r>
-            <a:r>
-              <a:rPr sz="1200" b="0" i="1">
-                <a:solidFill>
-                  <a:srgbClr val="3AEDE5"/>
-                </a:solidFill>
-                <a:latin typeface="Alegreya Sans"/>
-              </a:rPr>
-              <a:t>  (16 mois)</a:t>
-            </a:r>
-          </a:p>
-          <a:p>
-            <a:pPr algn="l" lvl="1">
-              <a:spcAft>
-                <a:spcPts val="100"/>
-              </a:spcAft>
-            </a:pPr>
-            <a:r>
-              <a:rPr sz="1200" b="1" i="0">
-                <a:solidFill>
-                  <a:srgbClr val="3AEDE5"/>
-                </a:solidFill>
-                <a:latin typeface="Alegreya Sans"/>
-              </a:rPr>
-              <a:t>•  </a:t>
-            </a:r>
-            <a:r>
-              <a:rPr sz="1200" b="0" i="0">
-                <a:solidFill>
-                  <a:srgbClr val="FFFFFF"/>
-                </a:solidFill>
-                <a:latin typeface="Alegreya Sans"/>
-              </a:rPr>
-              <a:t>Pilotage de l'implémentation CRR II sur le risque de crédit (besoins, spécifications, tests) ; rapports EBA 3.0 et COREP soumis au superviseur.</a:t>
-            </a:r>
-          </a:p>
-          <a:p>
-            <a:pPr algn="l" lvl="1">
-              <a:spcAft>
-                <a:spcPts val="100"/>
-              </a:spcAft>
-            </a:pPr>
-            <a:r>
-              <a:rPr sz="1200" b="1" i="0">
-                <a:solidFill>
-                  <a:srgbClr val="3AEDE5"/>
-                </a:solidFill>
-                <a:latin typeface="Alegreya Sans"/>
-              </a:rPr>
-              <a:t>•  </a:t>
-            </a:r>
-            <a:r>
-              <a:rPr sz="1200" b="0" i="0">
-                <a:solidFill>
-                  <a:srgbClr val="FFFFFF"/>
-                </a:solidFill>
-                <a:latin typeface="Alegreya Sans"/>
-              </a:rPr>
-              <a:t>Stress tests EBA : impacts provisions / RWA, cartographie des modèles IFRS 9, exécution d'une simulation (PD, LGD, RWA).</a:t>
-            </a:r>
-          </a:p>
-          <a:p>
-            <a:pPr algn="l">
-              <a:spcAft>
-                <a:spcPts val="100"/>
-              </a:spcAft>
-            </a:pPr>
-            <a:r>
-              <a:rPr sz="1200" b="1" i="0">
-                <a:solidFill>
-                  <a:srgbClr val="3AEDE5"/>
-                </a:solidFill>
-                <a:latin typeface="Alegreya Sans"/>
-              </a:rPr>
-              <a:t>▸ </a:t>
-            </a:r>
-            <a:r>
-              <a:rPr sz="1200" b="1" i="0">
-                <a:solidFill>
-                  <a:srgbClr val="FFFFFF"/>
-                </a:solidFill>
-                <a:latin typeface="Alegreya Sans"/>
-              </a:rPr>
-              <a:t>BNP Paribas Personal Finance</a:t>
-            </a:r>
-            <a:r>
-              <a:rPr sz="1200" b="0" i="0">
-                <a:solidFill>
-                  <a:srgbClr val="FFFFFF"/>
-                </a:solidFill>
-                <a:latin typeface="Alegreya Sans"/>
-              </a:rPr>
-              <a:t> — Transformation Risk &amp; BCBS 239 — PMO (EY)</a:t>
-            </a:r>
-            <a:r>
-              <a:rPr sz="1200" b="0" i="1">
-                <a:solidFill>
-                  <a:srgbClr val="3AEDE5"/>
-                </a:solidFill>
-                <a:latin typeface="Alegreya Sans"/>
-              </a:rPr>
-              <a:t>  (18 mois)</a:t>
-            </a:r>
-          </a:p>
-          <a:p>
-            <a:pPr algn="l" lvl="1">
-              <a:spcAft>
-                <a:spcPts val="100"/>
-              </a:spcAft>
-            </a:pPr>
-            <a:r>
-              <a:rPr sz="1200" b="1" i="0">
-                <a:solidFill>
-                  <a:srgbClr val="3AEDE5"/>
-                </a:solidFill>
-                <a:latin typeface="Alegreya Sans"/>
-              </a:rPr>
-              <a:t>•  </a:t>
-            </a:r>
-            <a:r>
-              <a:rPr sz="1200" b="0" i="0">
-                <a:solidFill>
-                  <a:srgbClr val="FFFFFF"/>
-                </a:solidFill>
-                <a:latin typeface="Alegreya Sans"/>
-              </a:rPr>
-              <a:t>Transformation du département Risk de la région SUN (6 pays) : macro-processus simplifiés, modèles d'exploitation cibles, revue des contrats fournisseurs.</a:t>
+              <a:t>Animation des comités projets et ateliers métiers, accompagnement des utilisateurs dans la conduite du changement.</a:t>
             </a:r>
           </a:p>
         </p:txBody>
@@ -4277,7 +4174,7 @@
                 </a:solidFill>
                 <a:latin typeface="Alegreya Sans"/>
               </a:rPr>
-              <a:t>MOA Project Manager — Banking Risk &amp; Regulatory</a:t>
+              <a:t>Chef de Projet MOA — Risques &amp; Réglementaire Bancaire (suite)</a:t>
             </a:r>
           </a:p>
           <a:p>
@@ -4293,7 +4190,7 @@
                 </a:solidFill>
                 <a:latin typeface="Alegreya Sans"/>
               </a:rPr>
-              <a:t>Credit risk, data quality (BCBS 239), Basel IV / CRR III</a:t>
+              <a:t>Risque de crédit, qualité des données (BCBS 239), Bâle IV / CRR III</a:t>
             </a:r>
           </a:p>
         </p:txBody>
@@ -4332,7 +4229,7 @@
                 </a:solidFill>
                 <a:latin typeface="Alegreya Sans"/>
               </a:rPr>
-              <a:t>MAIN AREAS OF EXPERTISE</a:t>
+              <a:t>DOMAINES D'EXPERTISE</a:t>
             </a:r>
           </a:p>
           <a:p>
@@ -4357,7 +4254,7 @@
                 </a:solidFill>
                 <a:latin typeface="Alegreya Sans"/>
               </a:rPr>
-              <a:t>Regulation: Basel IV, CRR III, Stress Tests, NDOD, Pillar 3 ESG</a:t>
+              <a:t>Réglementation financière : Bâle IV, CRR III, Stress Tests, NDOD, Taxonomie, Pilier 3 ESG</a:t>
             </a:r>
           </a:p>
           <a:p>
@@ -4382,7 +4279,7 @@
                 </a:solidFill>
                 <a:latin typeface="Alegreya Sans"/>
               </a:rPr>
-              <a:t>Credit risk</a:t>
+              <a:t>Risque de crédit</a:t>
             </a:r>
           </a:p>
           <a:p>
@@ -4407,7 +4304,7 @@
                 </a:solidFill>
                 <a:latin typeface="Alegreya Sans"/>
               </a:rPr>
-              <a:t>Data quality (BCBS 239)</a:t>
+              <a:t>Qualité des données (BCBS 239)</a:t>
             </a:r>
           </a:p>
           <a:p>
@@ -4432,7 +4329,7 @@
                 </a:solidFill>
                 <a:latin typeface="Alegreya Sans"/>
               </a:rPr>
-              <a:t>Project management &amp; business analysis (specs, UAT)</a:t>
+              <a:t>Chef de projet / gestion de projet</a:t>
             </a:r>
           </a:p>
           <a:p>
@@ -4457,30 +4354,11 @@
                 </a:solidFill>
                 <a:latin typeface="Alegreya Sans"/>
               </a:rPr>
-              <a:t>Tools: SQL, VBA, Power BI, JIRA</a:t>
+              <a:t>MOA : expression de besoin, spécifications fonctionnelles, recette</a:t>
             </a:r>
           </a:p>
           <a:p>
             <a:pPr algn="l">
-              <a:spcBef>
-                <a:spcPts val="600"/>
-              </a:spcBef>
-              <a:spcAft>
-                <a:spcPts val="300"/>
-              </a:spcAft>
-            </a:pPr>
-            <a:r>
-              <a:rPr sz="1300" b="1" i="0">
-                <a:solidFill>
-                  <a:srgbClr val="3AEDE5"/>
-                </a:solidFill>
-                <a:latin typeface="Alegreya Sans"/>
-              </a:rPr>
-              <a:t>EDUCATION &amp; CERTIFICATIONS</a:t>
-            </a:r>
-          </a:p>
-          <a:p>
-            <a:pPr algn="l">
               <a:spcAft>
                 <a:spcPts val="100"/>
               </a:spcAft>
@@ -4492,73 +4370,16 @@
                 </a:solidFill>
                 <a:latin typeface="Alegreya Sans"/>
               </a:rPr>
-              <a:t>2017  </a:t>
-            </a:r>
-            <a:r>
-              <a:rPr sz="1200" b="1" i="0">
-                <a:solidFill>
-                  <a:srgbClr val="FFFFFF"/>
-                </a:solidFill>
-                <a:latin typeface="Alegreya Sans"/>
-              </a:rPr>
-              <a:t>IGR-IAE — Rennes Graduate School of Management</a:t>
-            </a:r>
-          </a:p>
-          <a:p>
-            <a:pPr algn="l">
-              <a:spcAft>
-                <a:spcPts val="300"/>
-              </a:spcAft>
-            </a:pPr>
-            <a:r>
-              <a:rPr sz="1200" b="0" i="1">
-                <a:solidFill>
-                  <a:srgbClr val="CCD6E8"/>
-                </a:solidFill>
-                <a:latin typeface="Alegreya Sans"/>
-              </a:rPr>
-              <a:t>M2 Audit &amp; Risk Management (work-study)</a:t>
-            </a:r>
-          </a:p>
-          <a:p>
-            <a:pPr algn="l">
-              <a:spcAft>
-                <a:spcPts val="100"/>
-              </a:spcAft>
-            </a:pPr>
-            <a:r>
-              <a:rPr sz="1200" b="1" i="0">
-                <a:solidFill>
-                  <a:srgbClr val="3AEDE5"/>
-                </a:solidFill>
-                <a:latin typeface="Alegreya Sans"/>
-              </a:rPr>
-              <a:t>—  </a:t>
-            </a:r>
-            <a:r>
-              <a:rPr sz="1200" b="1" i="0">
-                <a:solidFill>
-                  <a:srgbClr val="FFFFFF"/>
-                </a:solidFill>
-                <a:latin typeface="Alegreya Sans"/>
-              </a:rPr>
-              <a:t>Certifications</a:t>
-            </a:r>
-          </a:p>
-          <a:p>
-            <a:pPr algn="l">
-              <a:spcAft>
-                <a:spcPts val="300"/>
-              </a:spcAft>
-            </a:pPr>
-            <a:r>
-              <a:rPr sz="1200" b="0" i="1">
-                <a:solidFill>
-                  <a:srgbClr val="CCD6E8"/>
-                </a:solidFill>
-                <a:latin typeface="Alegreya Sans"/>
-              </a:rPr>
-              <a:t>AMF · BMC (Bloomberg Market Concepts)</a:t>
+              <a:t>•  </a:t>
+            </a:r>
+            <a:r>
+              <a:rPr sz="1200" b="0" i="0">
+                <a:solidFill>
+                  <a:srgbClr val="FFFFFF"/>
+                </a:solidFill>
+                <a:latin typeface="Alegreya Sans"/>
+              </a:rPr>
+              <a:t>Outils : MS Office, VBA, SQL, Power BI, JIRA</a:t>
             </a:r>
           </a:p>
         </p:txBody>
@@ -4597,15 +4418,33 @@
                 </a:solidFill>
                 <a:latin typeface="Alegreya Sans"/>
               </a:rPr>
-              <a:t>SUMMARY</a:t>
+              <a:t>PRINCIPALES EXPÉRIENCES PROFESSIONNELLES (suite)</a:t>
             </a:r>
           </a:p>
           <a:p>
             <a:pPr algn="l">
               <a:spcAft>
-                <a:spcPts val="300"/>
-              </a:spcAft>
-            </a:pPr>
+                <a:spcPts val="100"/>
+              </a:spcAft>
+            </a:pPr>
+            <a:r>
+              <a:rPr sz="1200" b="1" i="0">
+                <a:solidFill>
+                  <a:srgbClr val="3AEDE5"/>
+                </a:solidFill>
+                <a:latin typeface="Alegreya Sans"/>
+              </a:rPr>
+              <a:t>▸ </a:t>
+            </a:r>
+            <a:r>
+              <a:rPr sz="1200" b="1" i="0">
+                <a:solidFill>
+                  <a:srgbClr val="FFFFFF"/>
+                </a:solidFill>
+                <a:latin typeface="Alegreya Sans"/>
+              </a:rPr>
+              <a:t>BNP Paribas — BCBS 239</a:t>
+            </a:r>
             <a:r>
               <a:rPr sz="1200" b="0" i="0">
                 <a:solidFill>
@@ -4613,30 +4452,120 @@
                 </a:solidFill>
                 <a:latin typeface="Alegreya Sans"/>
               </a:rPr>
-              <a:t>9 years leading transformation, risk-management and regulatory-compliance projects for financial institutions. Works at the business / IT interface: credit risk, data quality, regulatory change.</a:t>
+              <a:t> — Gestion de la qualité des données Risques (EY)</a:t>
+            </a:r>
+            <a:r>
+              <a:rPr sz="1200" b="0" i="1">
+                <a:solidFill>
+                  <a:srgbClr val="3AEDE5"/>
+                </a:solidFill>
+                <a:latin typeface="Alegreya Sans"/>
+              </a:rPr>
+              <a:t>  (14 mois)</a:t>
+            </a:r>
+          </a:p>
+          <a:p>
+            <a:pPr algn="l" lvl="1">
+              <a:spcAft>
+                <a:spcPts val="100"/>
+              </a:spcAft>
+            </a:pPr>
+            <a:r>
+              <a:rPr sz="1200" b="1" i="0">
+                <a:solidFill>
+                  <a:srgbClr val="3AEDE5"/>
+                </a:solidFill>
+                <a:latin typeface="Alegreya Sans"/>
+              </a:rPr>
+              <a:t>•  </a:t>
+            </a:r>
+            <a:r>
+              <a:rPr sz="1200" b="0" i="0">
+                <a:solidFill>
+                  <a:srgbClr val="FFFFFF"/>
+                </a:solidFill>
+                <a:latin typeface="Alegreya Sans"/>
+              </a:rPr>
+              <a:t>Mise en place d'un dispositif de gestion de la qualité des données utilisées par les modèles de notation des institutions financières (Risk Drivers, données de scoping) : identification et définition des données prioritaires.</a:t>
+            </a:r>
+          </a:p>
+          <a:p>
+            <a:pPr algn="l" lvl="1">
+              <a:spcAft>
+                <a:spcPts val="100"/>
+              </a:spcAft>
+            </a:pPr>
+            <a:r>
+              <a:rPr sz="1200" b="1" i="0">
+                <a:solidFill>
+                  <a:srgbClr val="3AEDE5"/>
+                </a:solidFill>
+                <a:latin typeface="Alegreya Sans"/>
+              </a:rPr>
+              <a:t>•  </a:t>
+            </a:r>
+            <a:r>
+              <a:rPr sz="1200" b="0" i="0">
+                <a:solidFill>
+                  <a:srgbClr val="FFFFFF"/>
+                </a:solidFill>
+                <a:latin typeface="Alegreya Sans"/>
+              </a:rPr>
+              <a:t>Définition et réalisation des contrôles techniques et opérationnels, identification et remédiation des problèmes de qualité des données.</a:t>
+            </a:r>
+          </a:p>
+          <a:p>
+            <a:pPr algn="l" lvl="1">
+              <a:spcAft>
+                <a:spcPts val="100"/>
+              </a:spcAft>
+            </a:pPr>
+            <a:r>
+              <a:rPr sz="1200" b="1" i="0">
+                <a:solidFill>
+                  <a:srgbClr val="3AEDE5"/>
+                </a:solidFill>
+                <a:latin typeface="Alegreya Sans"/>
+              </a:rPr>
+              <a:t>•  </a:t>
+            </a:r>
+            <a:r>
+              <a:rPr sz="1200" b="0" i="0">
+                <a:solidFill>
+                  <a:srgbClr val="FFFFFF"/>
+                </a:solidFill>
+                <a:latin typeface="Alegreya Sans"/>
+              </a:rPr>
+              <a:t>Production de tableaux de bord présentant les résultats de contrôles et les plans d'actions de remédiation.</a:t>
+            </a:r>
+          </a:p>
+          <a:p>
+            <a:pPr algn="l" lvl="1">
+              <a:spcAft>
+                <a:spcPts val="100"/>
+              </a:spcAft>
+            </a:pPr>
+            <a:r>
+              <a:rPr sz="1200" b="1" i="0">
+                <a:solidFill>
+                  <a:srgbClr val="3AEDE5"/>
+                </a:solidFill>
+                <a:latin typeface="Alegreya Sans"/>
+              </a:rPr>
+              <a:t>•  </a:t>
+            </a:r>
+            <a:r>
+              <a:rPr sz="1200" b="0" i="0">
+                <a:solidFill>
+                  <a:srgbClr val="FFFFFF"/>
+                </a:solidFill>
+                <a:latin typeface="Alegreya Sans"/>
+              </a:rPr>
+              <a:t>Préparation et formalisation des réponses aux recommandations BCE sur les sujets de qualité de données ; production du corpus documentaire.</a:t>
             </a:r>
           </a:p>
           <a:p>
             <a:pPr algn="l">
-              <a:spcBef>
-                <a:spcPts val="600"/>
-              </a:spcBef>
-              <a:spcAft>
-                <a:spcPts val="300"/>
-              </a:spcAft>
-            </a:pPr>
-            <a:r>
-              <a:rPr sz="1300" b="1" i="0">
-                <a:solidFill>
-                  <a:srgbClr val="3AEDE5"/>
-                </a:solidFill>
-                <a:latin typeface="Alegreya Sans"/>
-              </a:rPr>
-              <a:t>MAIN PROFESSIONAL EXPERIENCE</a:t>
-            </a:r>
-          </a:p>
-          <a:p>
-            <a:pPr algn="l">
               <a:spcAft>
                 <a:spcPts val="100"/>
               </a:spcAft>
@@ -4657,7 +4586,7 @@
                 </a:solidFill>
                 <a:latin typeface="Alegreya Sans"/>
               </a:rPr>
-              <a:t>Crédit Agricole Leasing &amp; Factoring</a:t>
+              <a:t>BNP Paribas — NDOD</a:t>
             </a:r>
             <a:r>
               <a:rPr sz="1200" b="0" i="0">
@@ -4666,7 +4595,7 @@
                 </a:solidFill>
                 <a:latin typeface="Alegreya Sans"/>
               </a:rPr>
-              <a:t> — IT Project Manager — Leasing Risk (Karat Advisory)</a:t>
+              <a:t> — Implémentation réglementaire (EY)</a:t>
             </a:r>
             <a:r>
               <a:rPr sz="1200" b="0" i="1">
@@ -4675,7 +4604,7 @@
                 </a:solidFill>
                 <a:latin typeface="Alegreya Sans"/>
               </a:rPr>
-              <a:t>  (2024 — 2026 · 22 months)</a:t>
+              <a:t>  (7 mois)</a:t>
             </a:r>
           </a:p>
           <a:p>
@@ -4700,7 +4629,7 @@
                 </a:solidFill>
                 <a:latin typeface="Alegreya Sans"/>
               </a:rPr>
-              <a:t>Led functional IT projects from framing to production: business requirements, impacts, specifications, test plans, go-live roadmap.</a:t>
+              <a:t>Définition des indicateurs d'évaluation des impacts potentiels de la réglementation NDOD sur les paramètres de risque de crédit.</a:t>
             </a:r>
           </a:p>
           <a:p>
@@ -4725,11 +4654,11 @@
                 </a:solidFill>
                 <a:latin typeface="Alegreya Sans"/>
               </a:rPr>
-              <a:t>Coordination with IT delivery, operational maintenance, steering of project committees and business workshops, change management.</a:t>
-            </a:r>
-          </a:p>
-          <a:p>
-            <a:pPr algn="l">
+              <a:t>Coordination de la production des indicateurs d'évaluation d'impact au sein des 8 entités du scope de travaux.</a:t>
+            </a:r>
+          </a:p>
+          <a:p>
+            <a:pPr algn="l" lvl="1">
               <a:spcAft>
                 <a:spcPts val="100"/>
               </a:spcAft>
@@ -4741,16 +4670,7 @@
                 </a:solidFill>
                 <a:latin typeface="Alegreya Sans"/>
               </a:rPr>
-              <a:t>▸ </a:t>
-            </a:r>
-            <a:r>
-              <a:rPr sz="1200" b="1" i="0">
-                <a:solidFill>
-                  <a:srgbClr val="FFFFFF"/>
-                </a:solidFill>
-                <a:latin typeface="Alegreya Sans"/>
-              </a:rPr>
-              <a:t>BNP Paribas — BCBS 239</a:t>
+              <a:t>•  </a:t>
             </a:r>
             <a:r>
               <a:rPr sz="1200" b="0" i="0">
@@ -4759,16 +4679,7 @@
                 </a:solidFill>
                 <a:latin typeface="Alegreya Sans"/>
               </a:rPr>
-              <a:t> — Risk Data Quality (EY)</a:t>
-            </a:r>
-            <a:r>
-              <a:rPr sz="1200" b="0" i="1">
-                <a:solidFill>
-                  <a:srgbClr val="3AEDE5"/>
-                </a:solidFill>
-                <a:latin typeface="Alegreya Sans"/>
-              </a:rPr>
-              <a:t>  (22 months)</a:t>
+              <a:t>Suivi, formalisation, consolidation et analyse des résultats de production des indicateurs d'impact.</a:t>
             </a:r>
           </a:p>
           <a:p>
@@ -4793,193 +4704,7 @@
                 </a:solidFill>
                 <a:latin typeface="Alegreya Sans"/>
               </a:rPr>
-              <a:t>Data-quality framework for rating-model data (risk drivers, scoping): technical and operational controls, remediation, dashboards.</a:t>
-            </a:r>
-          </a:p>
-          <a:p>
-            <a:pPr algn="l" lvl="1">
-              <a:spcAft>
-                <a:spcPts val="100"/>
-              </a:spcAft>
-            </a:pPr>
-            <a:r>
-              <a:rPr sz="1200" b="1" i="0">
-                <a:solidFill>
-                  <a:srgbClr val="3AEDE5"/>
-                </a:solidFill>
-                <a:latin typeface="Alegreya Sans"/>
-              </a:rPr>
-              <a:t>•  </a:t>
-            </a:r>
-            <a:r>
-              <a:rPr sz="1200" b="0" i="0">
-                <a:solidFill>
-                  <a:srgbClr val="FFFFFF"/>
-                </a:solidFill>
-                <a:latin typeface="Alegreya Sans"/>
-              </a:rPr>
-              <a:t>Group-level BCBS 239 compliance assessment, responses to ECB recommendations, ICAAP documentation on risk-data aggregation.</a:t>
-            </a:r>
-          </a:p>
-          <a:p>
-            <a:pPr algn="l">
-              <a:spcAft>
-                <a:spcPts val="100"/>
-              </a:spcAft>
-            </a:pPr>
-            <a:r>
-              <a:rPr sz="1200" b="1" i="0">
-                <a:solidFill>
-                  <a:srgbClr val="3AEDE5"/>
-                </a:solidFill>
-                <a:latin typeface="Alegreya Sans"/>
-              </a:rPr>
-              <a:t>▸ </a:t>
-            </a:r>
-            <a:r>
-              <a:rPr sz="1200" b="1" i="0">
-                <a:solidFill>
-                  <a:srgbClr val="FFFFFF"/>
-                </a:solidFill>
-                <a:latin typeface="Alegreya Sans"/>
-              </a:rPr>
-              <a:t>Dexia — CRR II / EBA 3.0 &amp; EBA Stress Tests</a:t>
-            </a:r>
-            <a:r>
-              <a:rPr sz="1200" b="0" i="0">
-                <a:solidFill>
-                  <a:srgbClr val="FFFFFF"/>
-                </a:solidFill>
-                <a:latin typeface="Alegreya Sans"/>
-              </a:rPr>
-              <a:t> — Project Manager (EY)</a:t>
-            </a:r>
-            <a:r>
-              <a:rPr sz="1200" b="0" i="1">
-                <a:solidFill>
-                  <a:srgbClr val="3AEDE5"/>
-                </a:solidFill>
-                <a:latin typeface="Alegreya Sans"/>
-              </a:rPr>
-              <a:t>  (16 months)</a:t>
-            </a:r>
-          </a:p>
-          <a:p>
-            <a:pPr algn="l" lvl="1">
-              <a:spcAft>
-                <a:spcPts val="100"/>
-              </a:spcAft>
-            </a:pPr>
-            <a:r>
-              <a:rPr sz="1200" b="1" i="0">
-                <a:solidFill>
-                  <a:srgbClr val="3AEDE5"/>
-                </a:solidFill>
-                <a:latin typeface="Alegreya Sans"/>
-              </a:rPr>
-              <a:t>•  </a:t>
-            </a:r>
-            <a:r>
-              <a:rPr sz="1200" b="0" i="0">
-                <a:solidFill>
-                  <a:srgbClr val="FFFFFF"/>
-                </a:solidFill>
-                <a:latin typeface="Alegreya Sans"/>
-              </a:rPr>
-              <a:t>Led the CRR II implementation across credit risk (requirements, specifications, testing); EBA 3.0 and COREP reports submitted to the supervisor.</a:t>
-            </a:r>
-          </a:p>
-          <a:p>
-            <a:pPr algn="l" lvl="1">
-              <a:spcAft>
-                <a:spcPts val="100"/>
-              </a:spcAft>
-            </a:pPr>
-            <a:r>
-              <a:rPr sz="1200" b="1" i="0">
-                <a:solidFill>
-                  <a:srgbClr val="3AEDE5"/>
-                </a:solidFill>
-                <a:latin typeface="Alegreya Sans"/>
-              </a:rPr>
-              <a:t>•  </a:t>
-            </a:r>
-            <a:r>
-              <a:rPr sz="1200" b="0" i="0">
-                <a:solidFill>
-                  <a:srgbClr val="FFFFFF"/>
-                </a:solidFill>
-                <a:latin typeface="Alegreya Sans"/>
-              </a:rPr>
-              <a:t>EBA stress tests: provisions / RWA impacts, mapping of IFRS 9 models, execution of a simulation exercise (PD, LGD, RWA).</a:t>
-            </a:r>
-          </a:p>
-          <a:p>
-            <a:pPr algn="l">
-              <a:spcAft>
-                <a:spcPts val="100"/>
-              </a:spcAft>
-            </a:pPr>
-            <a:r>
-              <a:rPr sz="1200" b="1" i="0">
-                <a:solidFill>
-                  <a:srgbClr val="3AEDE5"/>
-                </a:solidFill>
-                <a:latin typeface="Alegreya Sans"/>
-              </a:rPr>
-              <a:t>▸ </a:t>
-            </a:r>
-            <a:r>
-              <a:rPr sz="1200" b="1" i="0">
-                <a:solidFill>
-                  <a:srgbClr val="FFFFFF"/>
-                </a:solidFill>
-                <a:latin typeface="Alegreya Sans"/>
-              </a:rPr>
-              <a:t>BNP Paribas Personal Finance</a:t>
-            </a:r>
-            <a:r>
-              <a:rPr sz="1200" b="0" i="0">
-                <a:solidFill>
-                  <a:srgbClr val="FFFFFF"/>
-                </a:solidFill>
-                <a:latin typeface="Alegreya Sans"/>
-              </a:rPr>
-              <a:t> — Risk Transformation &amp; BCBS 239 — PMO (EY)</a:t>
-            </a:r>
-            <a:r>
-              <a:rPr sz="1200" b="0" i="1">
-                <a:solidFill>
-                  <a:srgbClr val="3AEDE5"/>
-                </a:solidFill>
-                <a:latin typeface="Alegreya Sans"/>
-              </a:rPr>
-              <a:t>  (18 months)</a:t>
-            </a:r>
-          </a:p>
-          <a:p>
-            <a:pPr algn="l" lvl="1">
-              <a:spcAft>
-                <a:spcPts val="100"/>
-              </a:spcAft>
-            </a:pPr>
-            <a:r>
-              <a:rPr sz="1200" b="1" i="0">
-                <a:solidFill>
-                  <a:srgbClr val="3AEDE5"/>
-                </a:solidFill>
-                <a:latin typeface="Alegreya Sans"/>
-              </a:rPr>
-              <a:t>•  </a:t>
-            </a:r>
-            <a:r>
-              <a:rPr sz="1200" b="0" i="0">
-                <a:solidFill>
-                  <a:srgbClr val="FFFFFF"/>
-                </a:solidFill>
-                <a:latin typeface="Alegreya Sans"/>
-              </a:rPr>
-              <a:t>Transformation of the Risk department in the SUN region (6 countries): simplified macro-processes, target operating models, supplier contract review.</a:t>
+              <a:t>Gestion de projet (PMO) : animation des meetings, rétroplanning, coordination des échanges avec le superviseur pour le suivi des recommandations.</a:t>
             </a:r>
           </a:p>
         </p:txBody>
@@ -5058,7 +4783,2364 @@
                 </a:solidFill>
                 <a:latin typeface="Alegreya Sans"/>
               </a:rPr>
-              <a:t>The information in this document is strictly confidential — This document may only be shared with the owner's consent</a:t>
+              <a:t>Les informations de ce document sont strictement confidentielles — Ce document ne peut être partagé qu'avec l'accord de son propriétaire</a:t>
+            </a:r>
+          </a:p>
+        </p:txBody>
+      </p:sp>
+    </p:spTree>
+  </p:cSld>
+  <p:clrMapOvr>
+    <a:masterClrMapping/>
+  </p:clrMapOvr>
+</p:sld>
+</file>
+
+<file path=ppt/slides/slide3.xml><?xml version="1.0" encoding="utf-8"?>
+<p:sld xmlns:a="http://schemas.openxmlformats.org/drawingml/2006/main" xmlns:p="http://schemas.openxmlformats.org/presentationml/2006/main" xmlns:r="http://schemas.openxmlformats.org/officeDocument/2006/relationships">
+  <p:cSld>
+    <p:spTree>
+      <p:nvGrpSpPr>
+        <p:cNvPr id="1" name=""/>
+        <p:cNvGrpSpPr/>
+        <p:nvPr/>
+      </p:nvGrpSpPr>
+      <p:grpSpPr/>
+      <p:sp>
+        <p:nvSpPr>
+          <p:cNvPr id="2" name="Rectangle 1"/>
+          <p:cNvSpPr/>
+          <p:nvPr/>
+        </p:nvSpPr>
+        <p:spPr>
+          <a:xfrm>
+            <a:off x="0" y="0"/>
+            <a:ext cx="12192000" cy="6858000"/>
+          </a:xfrm>
+          <a:prstGeom prst="rect">
+            <a:avLst/>
+          </a:prstGeom>
+          <a:solidFill>
+            <a:srgbClr val="061A5E"/>
+          </a:solidFill>
+          <a:ln>
+            <a:noFill/>
+          </a:ln>
+          <a:effectLst/>
+        </p:spPr>
+        <p:style>
+          <a:lnRef idx="1">
+            <a:schemeClr val="accent1"/>
+          </a:lnRef>
+          <a:fillRef idx="3">
+            <a:schemeClr val="accent1"/>
+          </a:fillRef>
+          <a:effectRef idx="2">
+            <a:schemeClr val="accent1"/>
+          </a:effectRef>
+          <a:fontRef idx="minor">
+            <a:schemeClr val="lt1"/>
+          </a:fontRef>
+        </p:style>
+        <p:txBody>
+          <a:bodyPr rtlCol="0" anchor="ctr"/>
+          <a:lstStyle/>
+          <a:p>
+            <a:pPr algn="ctr"/>
+          </a:p>
+        </p:txBody>
+      </p:sp>
+      <p:sp>
+        <p:nvSpPr>
+          <p:cNvPr id="3" name="Rectangle 2"/>
+          <p:cNvSpPr/>
+          <p:nvPr/>
+        </p:nvSpPr>
+        <p:spPr>
+          <a:xfrm>
+            <a:off x="4300000" y="0"/>
+            <a:ext cx="15000" cy="6858000"/>
+          </a:xfrm>
+          <a:prstGeom prst="rect">
+            <a:avLst/>
+          </a:prstGeom>
+          <a:solidFill>
+            <a:srgbClr val="3AEDE5"/>
+          </a:solidFill>
+          <a:ln>
+            <a:noFill/>
+          </a:ln>
+          <a:effectLst/>
+        </p:spPr>
+        <p:style>
+          <a:lnRef idx="1">
+            <a:schemeClr val="accent1"/>
+          </a:lnRef>
+          <a:fillRef idx="3">
+            <a:schemeClr val="accent1"/>
+          </a:fillRef>
+          <a:effectRef idx="2">
+            <a:schemeClr val="accent1"/>
+          </a:effectRef>
+          <a:fontRef idx="minor">
+            <a:schemeClr val="lt1"/>
+          </a:fontRef>
+        </p:style>
+        <p:txBody>
+          <a:bodyPr rtlCol="0" anchor="ctr"/>
+          <a:lstStyle/>
+          <a:p>
+            <a:pPr algn="ctr"/>
+          </a:p>
+        </p:txBody>
+      </p:sp>
+      <p:pic>
+        <p:nvPicPr>
+          <p:cNvPr id="4" name="Picture 3" descr="inside_circle_logo.png"/>
+          <p:cNvPicPr>
+            <a:picLocks noChangeAspect="1"/>
+          </p:cNvPicPr>
+          <p:nvPr/>
+        </p:nvPicPr>
+        <p:blipFill>
+          <a:blip r:embed="rId2"/>
+          <a:stretch>
+            <a:fillRect/>
+          </a:stretch>
+        </p:blipFill>
+        <p:spPr>
+          <a:xfrm>
+            <a:off x="10660000" y="130000"/>
+            <a:ext cx="1302000" cy="420000"/>
+          </a:xfrm>
+          <a:prstGeom prst="rect">
+            <a:avLst/>
+          </a:prstGeom>
+        </p:spPr>
+      </p:pic>
+      <p:sp>
+        <p:nvSpPr>
+          <p:cNvPr id="5" name="TextBox 4"/>
+          <p:cNvSpPr txBox="1"/>
+          <p:nvPr/>
+        </p:nvSpPr>
+        <p:spPr>
+          <a:xfrm>
+            <a:off x="228600" y="240000"/>
+            <a:ext cx="3842800" cy="1300000"/>
+          </a:xfrm>
+          <a:prstGeom prst="rect">
+            <a:avLst/>
+          </a:prstGeom>
+          <a:noFill/>
+        </p:spPr>
+        <p:txBody>
+          <a:bodyPr wrap="square" lIns="0" rIns="0" tIns="0" bIns="0">
+            <a:spAutoFit/>
+          </a:bodyPr>
+          <a:lstStyle/>
+          <a:p>
+            <a:pPr algn="l"/>
+            <a:r>
+              <a:rPr sz="2800" b="0" i="0">
+                <a:solidFill>
+                  <a:srgbClr val="3AEDE5"/>
+                </a:solidFill>
+                <a:latin typeface="Alegreya Sans"/>
+              </a:rPr>
+              <a:t>Raoul Loïc</a:t>
+            </a:r>
+          </a:p>
+          <a:p>
+            <a:pPr>
+              <a:spcBef>
+                <a:spcPts val="0"/>
+              </a:spcBef>
+            </a:pPr>
+            <a:r>
+              <a:rPr sz="3200" b="1" i="0">
+                <a:solidFill>
+                  <a:srgbClr val="3AEDE5"/>
+                </a:solidFill>
+                <a:latin typeface="Alegreya Sans"/>
+              </a:rPr>
+              <a:t>TSATCHOU</a:t>
+            </a:r>
+          </a:p>
+        </p:txBody>
+      </p:sp>
+      <p:sp>
+        <p:nvSpPr>
+          <p:cNvPr id="6" name="TextBox 5"/>
+          <p:cNvSpPr txBox="1"/>
+          <p:nvPr/>
+        </p:nvSpPr>
+        <p:spPr>
+          <a:xfrm>
+            <a:off x="4528600" y="300000"/>
+            <a:ext cx="5963400" cy="800000"/>
+          </a:xfrm>
+          <a:prstGeom prst="rect">
+            <a:avLst/>
+          </a:prstGeom>
+          <a:noFill/>
+        </p:spPr>
+        <p:txBody>
+          <a:bodyPr wrap="square" lIns="0" rIns="0" tIns="0" bIns="0">
+            <a:spAutoFit/>
+          </a:bodyPr>
+          <a:lstStyle/>
+          <a:p>
+            <a:r>
+              <a:rPr sz="2400" b="1" i="0">
+                <a:solidFill>
+                  <a:srgbClr val="FFFFFF"/>
+                </a:solidFill>
+                <a:latin typeface="Alegreya Sans"/>
+              </a:rPr>
+              <a:t>Chef de Projet MOA — Risques &amp; Réglementaire Bancaire (suite)</a:t>
+            </a:r>
+          </a:p>
+          <a:p>
+            <a:pPr>
+              <a:spcBef>
+                <a:spcPts val="200"/>
+              </a:spcBef>
+            </a:pPr>
+            <a:r>
+              <a:rPr sz="1500" b="0" i="1">
+                <a:solidFill>
+                  <a:srgbClr val="3AEDE5"/>
+                </a:solidFill>
+                <a:latin typeface="Alegreya Sans"/>
+              </a:rPr>
+              <a:t>Risque de crédit, qualité des données (BCBS 239), Bâle IV / CRR III</a:t>
+            </a:r>
+          </a:p>
+        </p:txBody>
+      </p:sp>
+      <p:sp>
+        <p:nvSpPr>
+          <p:cNvPr id="7" name="TextBox 6"/>
+          <p:cNvSpPr txBox="1"/>
+          <p:nvPr/>
+        </p:nvSpPr>
+        <p:spPr>
+          <a:xfrm>
+            <a:off x="228600" y="1180000"/>
+            <a:ext cx="3842800" cy="5318000"/>
+          </a:xfrm>
+          <a:prstGeom prst="rect">
+            <a:avLst/>
+          </a:prstGeom>
+          <a:noFill/>
+        </p:spPr>
+        <p:txBody>
+          <a:bodyPr wrap="square" lIns="0" rIns="0" tIns="0" bIns="0">
+            <a:spAutoFit/>
+          </a:bodyPr>
+          <a:lstStyle/>
+          <a:p>
+            <a:pPr algn="l">
+              <a:spcAft>
+                <a:spcPts val="300"/>
+              </a:spcAft>
+            </a:pPr>
+            <a:r>
+              <a:rPr sz="1300" b="1" i="0">
+                <a:solidFill>
+                  <a:srgbClr val="3AEDE5"/>
+                </a:solidFill>
+                <a:latin typeface="Alegreya Sans"/>
+              </a:rPr>
+              <a:t>DOMAINES D'EXPERTISE</a:t>
+            </a:r>
+          </a:p>
+          <a:p>
+            <a:pPr algn="l">
+              <a:spcAft>
+                <a:spcPts val="100"/>
+              </a:spcAft>
+            </a:pPr>
+            <a:r>
+              <a:rPr sz="1200" b="1" i="0">
+                <a:solidFill>
+                  <a:srgbClr val="3AEDE5"/>
+                </a:solidFill>
+                <a:latin typeface="Alegreya Sans"/>
+              </a:rPr>
+              <a:t>•  </a:t>
+            </a:r>
+            <a:r>
+              <a:rPr sz="1200" b="0" i="0">
+                <a:solidFill>
+                  <a:srgbClr val="FFFFFF"/>
+                </a:solidFill>
+                <a:latin typeface="Alegreya Sans"/>
+              </a:rPr>
+              <a:t>Réglementation financière : Bâle IV, CRR III, Stress Tests, NDOD, Taxonomie, Pilier 3 ESG</a:t>
+            </a:r>
+          </a:p>
+          <a:p>
+            <a:pPr algn="l">
+              <a:spcAft>
+                <a:spcPts val="100"/>
+              </a:spcAft>
+            </a:pPr>
+            <a:r>
+              <a:rPr sz="1200" b="1" i="0">
+                <a:solidFill>
+                  <a:srgbClr val="3AEDE5"/>
+                </a:solidFill>
+                <a:latin typeface="Alegreya Sans"/>
+              </a:rPr>
+              <a:t>•  </a:t>
+            </a:r>
+            <a:r>
+              <a:rPr sz="1200" b="0" i="0">
+                <a:solidFill>
+                  <a:srgbClr val="FFFFFF"/>
+                </a:solidFill>
+                <a:latin typeface="Alegreya Sans"/>
+              </a:rPr>
+              <a:t>Risque de crédit</a:t>
+            </a:r>
+          </a:p>
+          <a:p>
+            <a:pPr algn="l">
+              <a:spcAft>
+                <a:spcPts val="100"/>
+              </a:spcAft>
+            </a:pPr>
+            <a:r>
+              <a:rPr sz="1200" b="1" i="0">
+                <a:solidFill>
+                  <a:srgbClr val="3AEDE5"/>
+                </a:solidFill>
+                <a:latin typeface="Alegreya Sans"/>
+              </a:rPr>
+              <a:t>•  </a:t>
+            </a:r>
+            <a:r>
+              <a:rPr sz="1200" b="0" i="0">
+                <a:solidFill>
+                  <a:srgbClr val="FFFFFF"/>
+                </a:solidFill>
+                <a:latin typeface="Alegreya Sans"/>
+              </a:rPr>
+              <a:t>Qualité des données (BCBS 239)</a:t>
+            </a:r>
+          </a:p>
+          <a:p>
+            <a:pPr algn="l">
+              <a:spcAft>
+                <a:spcPts val="100"/>
+              </a:spcAft>
+            </a:pPr>
+            <a:r>
+              <a:rPr sz="1200" b="1" i="0">
+                <a:solidFill>
+                  <a:srgbClr val="3AEDE5"/>
+                </a:solidFill>
+                <a:latin typeface="Alegreya Sans"/>
+              </a:rPr>
+              <a:t>•  </a:t>
+            </a:r>
+            <a:r>
+              <a:rPr sz="1200" b="0" i="0">
+                <a:solidFill>
+                  <a:srgbClr val="FFFFFF"/>
+                </a:solidFill>
+                <a:latin typeface="Alegreya Sans"/>
+              </a:rPr>
+              <a:t>Chef de projet / gestion de projet</a:t>
+            </a:r>
+          </a:p>
+          <a:p>
+            <a:pPr algn="l">
+              <a:spcAft>
+                <a:spcPts val="100"/>
+              </a:spcAft>
+            </a:pPr>
+            <a:r>
+              <a:rPr sz="1200" b="1" i="0">
+                <a:solidFill>
+                  <a:srgbClr val="3AEDE5"/>
+                </a:solidFill>
+                <a:latin typeface="Alegreya Sans"/>
+              </a:rPr>
+              <a:t>•  </a:t>
+            </a:r>
+            <a:r>
+              <a:rPr sz="1200" b="0" i="0">
+                <a:solidFill>
+                  <a:srgbClr val="FFFFFF"/>
+                </a:solidFill>
+                <a:latin typeface="Alegreya Sans"/>
+              </a:rPr>
+              <a:t>MOA : expression de besoin, spécifications fonctionnelles, recette</a:t>
+            </a:r>
+          </a:p>
+          <a:p>
+            <a:pPr algn="l">
+              <a:spcAft>
+                <a:spcPts val="100"/>
+              </a:spcAft>
+            </a:pPr>
+            <a:r>
+              <a:rPr sz="1200" b="1" i="0">
+                <a:solidFill>
+                  <a:srgbClr val="3AEDE5"/>
+                </a:solidFill>
+                <a:latin typeface="Alegreya Sans"/>
+              </a:rPr>
+              <a:t>•  </a:t>
+            </a:r>
+            <a:r>
+              <a:rPr sz="1200" b="0" i="0">
+                <a:solidFill>
+                  <a:srgbClr val="FFFFFF"/>
+                </a:solidFill>
+                <a:latin typeface="Alegreya Sans"/>
+              </a:rPr>
+              <a:t>Outils : MS Office, VBA, SQL, Power BI, JIRA</a:t>
+            </a:r>
+          </a:p>
+        </p:txBody>
+      </p:sp>
+      <p:sp>
+        <p:nvSpPr>
+          <p:cNvPr id="8" name="TextBox 7"/>
+          <p:cNvSpPr txBox="1"/>
+          <p:nvPr/>
+        </p:nvSpPr>
+        <p:spPr>
+          <a:xfrm>
+            <a:off x="4528600" y="1180000"/>
+            <a:ext cx="7434800" cy="5318000"/>
+          </a:xfrm>
+          <a:prstGeom prst="rect">
+            <a:avLst/>
+          </a:prstGeom>
+          <a:noFill/>
+        </p:spPr>
+        <p:txBody>
+          <a:bodyPr wrap="square" lIns="0" rIns="0" tIns="0" bIns="0">
+            <a:spAutoFit/>
+          </a:bodyPr>
+          <a:lstStyle/>
+          <a:p>
+            <a:pPr algn="l">
+              <a:spcAft>
+                <a:spcPts val="300"/>
+              </a:spcAft>
+            </a:pPr>
+            <a:r>
+              <a:rPr sz="1300" b="1" i="0">
+                <a:solidFill>
+                  <a:srgbClr val="3AEDE5"/>
+                </a:solidFill>
+                <a:latin typeface="Alegreya Sans"/>
+              </a:rPr>
+              <a:t>PRINCIPALES EXPÉRIENCES PROFESSIONNELLES (suite)</a:t>
+            </a:r>
+          </a:p>
+          <a:p>
+            <a:pPr algn="l">
+              <a:spcAft>
+                <a:spcPts val="100"/>
+              </a:spcAft>
+            </a:pPr>
+            <a:r>
+              <a:rPr sz="1200" b="1" i="0">
+                <a:solidFill>
+                  <a:srgbClr val="3AEDE5"/>
+                </a:solidFill>
+                <a:latin typeface="Alegreya Sans"/>
+              </a:rPr>
+              <a:t>▸ </a:t>
+            </a:r>
+            <a:r>
+              <a:rPr sz="1200" b="1" i="0">
+                <a:solidFill>
+                  <a:srgbClr val="FFFFFF"/>
+                </a:solidFill>
+                <a:latin typeface="Alegreya Sans"/>
+              </a:rPr>
+              <a:t>Dexia — CRR II &amp; EBA 3.0</a:t>
+            </a:r>
+            <a:r>
+              <a:rPr sz="1200" b="0" i="0">
+                <a:solidFill>
+                  <a:srgbClr val="FFFFFF"/>
+                </a:solidFill>
+                <a:latin typeface="Alegreya Sans"/>
+              </a:rPr>
+              <a:t> — Implémentation réglementaire (EY)</a:t>
+            </a:r>
+            <a:r>
+              <a:rPr sz="1200" b="0" i="1">
+                <a:solidFill>
+                  <a:srgbClr val="3AEDE5"/>
+                </a:solidFill>
+                <a:latin typeface="Alegreya Sans"/>
+              </a:rPr>
+              <a:t>  (6 mois)</a:t>
+            </a:r>
+          </a:p>
+          <a:p>
+            <a:pPr algn="l" lvl="1">
+              <a:spcAft>
+                <a:spcPts val="100"/>
+              </a:spcAft>
+            </a:pPr>
+            <a:r>
+              <a:rPr sz="1200" b="1" i="0">
+                <a:solidFill>
+                  <a:srgbClr val="3AEDE5"/>
+                </a:solidFill>
+                <a:latin typeface="Alegreya Sans"/>
+              </a:rPr>
+              <a:t>•  </a:t>
+            </a:r>
+            <a:r>
+              <a:rPr sz="1200" b="0" i="0">
+                <a:solidFill>
+                  <a:srgbClr val="FFFFFF"/>
+                </a:solidFill>
+                <a:latin typeface="Alegreya Sans"/>
+              </a:rPr>
+              <a:t>Pilotage du programme d'implémentation des évolutions CRR II sur le périmètre des risques de crédit.</a:t>
+            </a:r>
+          </a:p>
+          <a:p>
+            <a:pPr algn="l" lvl="1">
+              <a:spcAft>
+                <a:spcPts val="100"/>
+              </a:spcAft>
+            </a:pPr>
+            <a:r>
+              <a:rPr sz="1200" b="1" i="0">
+                <a:solidFill>
+                  <a:srgbClr val="3AEDE5"/>
+                </a:solidFill>
+                <a:latin typeface="Alegreya Sans"/>
+              </a:rPr>
+              <a:t>•  </a:t>
+            </a:r>
+            <a:r>
+              <a:rPr sz="1200" b="0" i="0">
+                <a:solidFill>
+                  <a:srgbClr val="FFFFFF"/>
+                </a:solidFill>
+                <a:latin typeface="Alegreya Sans"/>
+              </a:rPr>
+              <a:t>Suivi des évolutions IT liées à l'implémentation (besoins métiers, spécifications, développements, tests).</a:t>
+            </a:r>
+          </a:p>
+          <a:p>
+            <a:pPr algn="l" lvl="1">
+              <a:spcAft>
+                <a:spcPts val="100"/>
+              </a:spcAft>
+            </a:pPr>
+            <a:r>
+              <a:rPr sz="1200" b="1" i="0">
+                <a:solidFill>
+                  <a:srgbClr val="3AEDE5"/>
+                </a:solidFill>
+                <a:latin typeface="Alegreya Sans"/>
+              </a:rPr>
+              <a:t>•  </a:t>
+            </a:r>
+            <a:r>
+              <a:rPr sz="1200" b="0" i="0">
+                <a:solidFill>
+                  <a:srgbClr val="FFFFFF"/>
+                </a:solidFill>
+                <a:latin typeface="Alegreya Sans"/>
+              </a:rPr>
+              <a:t>Suivi de la production des rapports EBA 3.0 et COREP, incluant les évolutions CRR II, et de leur soumission au superviseur.</a:t>
+            </a:r>
+          </a:p>
+          <a:p>
+            <a:pPr algn="l" lvl="1">
+              <a:spcAft>
+                <a:spcPts val="100"/>
+              </a:spcAft>
+            </a:pPr>
+            <a:r>
+              <a:rPr sz="1200" b="1" i="0">
+                <a:solidFill>
+                  <a:srgbClr val="3AEDE5"/>
+                </a:solidFill>
+                <a:latin typeface="Alegreya Sans"/>
+              </a:rPr>
+              <a:t>•  </a:t>
+            </a:r>
+            <a:r>
+              <a:rPr sz="1200" b="0" i="0">
+                <a:solidFill>
+                  <a:srgbClr val="FFFFFF"/>
+                </a:solidFill>
+                <a:latin typeface="Alegreya Sans"/>
+              </a:rPr>
+              <a:t>Gestion de la relation avec le fournisseur du moteur de calcul des paramètres de risques.</a:t>
+            </a:r>
+          </a:p>
+          <a:p>
+            <a:pPr algn="l" lvl="1">
+              <a:spcAft>
+                <a:spcPts val="100"/>
+              </a:spcAft>
+            </a:pPr>
+            <a:r>
+              <a:rPr sz="1200" b="1" i="0">
+                <a:solidFill>
+                  <a:srgbClr val="3AEDE5"/>
+                </a:solidFill>
+                <a:latin typeface="Alegreya Sans"/>
+              </a:rPr>
+              <a:t>•  </a:t>
+            </a:r>
+            <a:r>
+              <a:rPr sz="1200" b="0" i="0">
+                <a:solidFill>
+                  <a:srgbClr val="FFFFFF"/>
+                </a:solidFill>
+                <a:latin typeface="Alegreya Sans"/>
+              </a:rPr>
+              <a:t>Gestion de projet en Agile : rétroplanning, préparation et animation des comités, suivi budgétaire.</a:t>
+            </a:r>
+          </a:p>
+          <a:p>
+            <a:pPr algn="l">
+              <a:spcAft>
+                <a:spcPts val="100"/>
+              </a:spcAft>
+            </a:pPr>
+            <a:r>
+              <a:rPr sz="1200" b="1" i="0">
+                <a:solidFill>
+                  <a:srgbClr val="3AEDE5"/>
+                </a:solidFill>
+                <a:latin typeface="Alegreya Sans"/>
+              </a:rPr>
+              <a:t>▸ </a:t>
+            </a:r>
+            <a:r>
+              <a:rPr sz="1200" b="1" i="0">
+                <a:solidFill>
+                  <a:srgbClr val="FFFFFF"/>
+                </a:solidFill>
+                <a:latin typeface="Alegreya Sans"/>
+              </a:rPr>
+              <a:t>Dexia — Stress Tests EBA</a:t>
+            </a:r>
+            <a:r>
+              <a:rPr sz="1200" b="0" i="0">
+                <a:solidFill>
+                  <a:srgbClr val="FFFFFF"/>
+                </a:solidFill>
+                <a:latin typeface="Alegreya Sans"/>
+              </a:rPr>
+              <a:t> — Exercice réglementaire (EY)</a:t>
+            </a:r>
+            <a:r>
+              <a:rPr sz="1200" b="0" i="1">
+                <a:solidFill>
+                  <a:srgbClr val="3AEDE5"/>
+                </a:solidFill>
+                <a:latin typeface="Alegreya Sans"/>
+              </a:rPr>
+              <a:t>  (10 mois)</a:t>
+            </a:r>
+          </a:p>
+          <a:p>
+            <a:pPr algn="l" lvl="1">
+              <a:spcAft>
+                <a:spcPts val="100"/>
+              </a:spcAft>
+            </a:pPr>
+            <a:r>
+              <a:rPr sz="1200" b="1" i="0">
+                <a:solidFill>
+                  <a:srgbClr val="3AEDE5"/>
+                </a:solidFill>
+                <a:latin typeface="Alegreya Sans"/>
+              </a:rPr>
+              <a:t>•  </a:t>
+            </a:r>
+            <a:r>
+              <a:rPr sz="1200" b="0" i="0">
+                <a:solidFill>
+                  <a:srgbClr val="FFFFFF"/>
+                </a:solidFill>
+                <a:latin typeface="Alegreya Sans"/>
+              </a:rPr>
+              <a:t>Analyse des exigences méthodologiques EBA sur le périmètre risques de crédit et de leurs impacts sur les calculs des provisions et des RWA.</a:t>
+            </a:r>
+          </a:p>
+          <a:p>
+            <a:pPr algn="l" lvl="1">
+              <a:spcAft>
+                <a:spcPts val="100"/>
+              </a:spcAft>
+            </a:pPr>
+            <a:r>
+              <a:rPr sz="1200" b="1" i="0">
+                <a:solidFill>
+                  <a:srgbClr val="3AEDE5"/>
+                </a:solidFill>
+                <a:latin typeface="Alegreya Sans"/>
+              </a:rPr>
+              <a:t>•  </a:t>
+            </a:r>
+            <a:r>
+              <a:rPr sz="1200" b="0" i="0">
+                <a:solidFill>
+                  <a:srgbClr val="FFFFFF"/>
+                </a:solidFill>
+                <a:latin typeface="Alegreya Sans"/>
+              </a:rPr>
+              <a:t>Analyse de l'environnement Dexia et identification des adaptations nécessaires à l'application de la méthodologie EBA.</a:t>
+            </a:r>
+          </a:p>
+          <a:p>
+            <a:pPr algn="l" lvl="1">
+              <a:spcAft>
+                <a:spcPts val="100"/>
+              </a:spcAft>
+            </a:pPr>
+            <a:r>
+              <a:rPr sz="1200" b="1" i="0">
+                <a:solidFill>
+                  <a:srgbClr val="3AEDE5"/>
+                </a:solidFill>
+                <a:latin typeface="Alegreya Sans"/>
+              </a:rPr>
+              <a:t>•  </a:t>
+            </a:r>
+            <a:r>
+              <a:rPr sz="1200" b="0" i="0">
+                <a:solidFill>
+                  <a:srgbClr val="FFFFFF"/>
+                </a:solidFill>
+                <a:latin typeface="Alegreya Sans"/>
+              </a:rPr>
+              <a:t>Cartographie et analyse des modèles IFRS 9 utiles à l'exercice de stress test EBA.</a:t>
+            </a:r>
+          </a:p>
+          <a:p>
+            <a:pPr algn="l" lvl="1">
+              <a:spcAft>
+                <a:spcPts val="100"/>
+              </a:spcAft>
+            </a:pPr>
+            <a:r>
+              <a:rPr sz="1200" b="1" i="0">
+                <a:solidFill>
+                  <a:srgbClr val="3AEDE5"/>
+                </a:solidFill>
+                <a:latin typeface="Alegreya Sans"/>
+              </a:rPr>
+              <a:t>•  </a:t>
+            </a:r>
+            <a:r>
+              <a:rPr sz="1200" b="0" i="0">
+                <a:solidFill>
+                  <a:srgbClr val="FFFFFF"/>
+                </a:solidFill>
+                <a:latin typeface="Alegreya Sans"/>
+              </a:rPr>
+              <a:t>Exécution d'un exercice de simulation : alimentation des templates EBA en données historiques et stressées d'exposition, de provisions et de paramètres de risque (PD, LGD, RWA).</a:t>
+            </a:r>
+          </a:p>
+        </p:txBody>
+      </p:sp>
+      <p:sp>
+        <p:nvSpPr>
+          <p:cNvPr id="9" name="Rectangle 8"/>
+          <p:cNvSpPr/>
+          <p:nvPr/>
+        </p:nvSpPr>
+        <p:spPr>
+          <a:xfrm>
+            <a:off x="0" y="6578000"/>
+            <a:ext cx="12192000" cy="280000"/>
+          </a:xfrm>
+          <a:prstGeom prst="rect">
+            <a:avLst/>
+          </a:prstGeom>
+          <a:solidFill>
+            <a:srgbClr val="061A5E"/>
+          </a:solidFill>
+          <a:ln>
+            <a:noFill/>
+          </a:ln>
+          <a:effectLst/>
+        </p:spPr>
+        <p:style>
+          <a:lnRef idx="1">
+            <a:schemeClr val="accent1"/>
+          </a:lnRef>
+          <a:fillRef idx="3">
+            <a:schemeClr val="accent1"/>
+          </a:fillRef>
+          <a:effectRef idx="2">
+            <a:schemeClr val="accent1"/>
+          </a:effectRef>
+          <a:fontRef idx="minor">
+            <a:schemeClr val="lt1"/>
+          </a:fontRef>
+        </p:style>
+        <p:txBody>
+          <a:bodyPr rtlCol="0" anchor="ctr"/>
+          <a:lstStyle/>
+          <a:p>
+            <a:pPr algn="ctr"/>
+          </a:p>
+        </p:txBody>
+      </p:sp>
+      <p:sp>
+        <p:nvSpPr>
+          <p:cNvPr id="10" name="TextBox 9"/>
+          <p:cNvSpPr txBox="1"/>
+          <p:nvPr/>
+        </p:nvSpPr>
+        <p:spPr>
+          <a:xfrm>
+            <a:off x="228600" y="6578000"/>
+            <a:ext cx="11734800" cy="280000"/>
+          </a:xfrm>
+          <a:prstGeom prst="rect">
+            <a:avLst/>
+          </a:prstGeom>
+          <a:noFill/>
+        </p:spPr>
+        <p:txBody>
+          <a:bodyPr wrap="square" lIns="0" rIns="0" tIns="0" bIns="0">
+            <a:spAutoFit/>
+          </a:bodyPr>
+          <a:lstStyle/>
+          <a:p>
+            <a:pPr algn="ctr"/>
+            <a:r>
+              <a:rPr sz="1000" b="0" i="1">
+                <a:solidFill>
+                  <a:srgbClr val="CCD6E8"/>
+                </a:solidFill>
+                <a:latin typeface="Alegreya Sans"/>
+              </a:rPr>
+              <a:t>Les informations de ce document sont strictement confidentielles — Ce document ne peut être partagé qu'avec l'accord de son propriétaire</a:t>
+            </a:r>
+          </a:p>
+        </p:txBody>
+      </p:sp>
+    </p:spTree>
+  </p:cSld>
+  <p:clrMapOvr>
+    <a:masterClrMapping/>
+  </p:clrMapOvr>
+</p:sld>
+</file>
+
+<file path=ppt/slides/slide4.xml><?xml version="1.0" encoding="utf-8"?>
+<p:sld xmlns:a="http://schemas.openxmlformats.org/drawingml/2006/main" xmlns:p="http://schemas.openxmlformats.org/presentationml/2006/main" xmlns:r="http://schemas.openxmlformats.org/officeDocument/2006/relationships">
+  <p:cSld>
+    <p:spTree>
+      <p:nvGrpSpPr>
+        <p:cNvPr id="1" name=""/>
+        <p:cNvGrpSpPr/>
+        <p:nvPr/>
+      </p:nvGrpSpPr>
+      <p:grpSpPr/>
+      <p:sp>
+        <p:nvSpPr>
+          <p:cNvPr id="2" name="Rectangle 1"/>
+          <p:cNvSpPr/>
+          <p:nvPr/>
+        </p:nvSpPr>
+        <p:spPr>
+          <a:xfrm>
+            <a:off x="0" y="0"/>
+            <a:ext cx="12192000" cy="6858000"/>
+          </a:xfrm>
+          <a:prstGeom prst="rect">
+            <a:avLst/>
+          </a:prstGeom>
+          <a:solidFill>
+            <a:srgbClr val="061A5E"/>
+          </a:solidFill>
+          <a:ln>
+            <a:noFill/>
+          </a:ln>
+          <a:effectLst/>
+        </p:spPr>
+        <p:style>
+          <a:lnRef idx="1">
+            <a:schemeClr val="accent1"/>
+          </a:lnRef>
+          <a:fillRef idx="3">
+            <a:schemeClr val="accent1"/>
+          </a:fillRef>
+          <a:effectRef idx="2">
+            <a:schemeClr val="accent1"/>
+          </a:effectRef>
+          <a:fontRef idx="minor">
+            <a:schemeClr val="lt1"/>
+          </a:fontRef>
+        </p:style>
+        <p:txBody>
+          <a:bodyPr rtlCol="0" anchor="ctr"/>
+          <a:lstStyle/>
+          <a:p>
+            <a:pPr algn="ctr"/>
+          </a:p>
+        </p:txBody>
+      </p:sp>
+      <p:sp>
+        <p:nvSpPr>
+          <p:cNvPr id="3" name="Rectangle 2"/>
+          <p:cNvSpPr/>
+          <p:nvPr/>
+        </p:nvSpPr>
+        <p:spPr>
+          <a:xfrm>
+            <a:off x="4300000" y="0"/>
+            <a:ext cx="15000" cy="6858000"/>
+          </a:xfrm>
+          <a:prstGeom prst="rect">
+            <a:avLst/>
+          </a:prstGeom>
+          <a:solidFill>
+            <a:srgbClr val="3AEDE5"/>
+          </a:solidFill>
+          <a:ln>
+            <a:noFill/>
+          </a:ln>
+          <a:effectLst/>
+        </p:spPr>
+        <p:style>
+          <a:lnRef idx="1">
+            <a:schemeClr val="accent1"/>
+          </a:lnRef>
+          <a:fillRef idx="3">
+            <a:schemeClr val="accent1"/>
+          </a:fillRef>
+          <a:effectRef idx="2">
+            <a:schemeClr val="accent1"/>
+          </a:effectRef>
+          <a:fontRef idx="minor">
+            <a:schemeClr val="lt1"/>
+          </a:fontRef>
+        </p:style>
+        <p:txBody>
+          <a:bodyPr rtlCol="0" anchor="ctr"/>
+          <a:lstStyle/>
+          <a:p>
+            <a:pPr algn="ctr"/>
+          </a:p>
+        </p:txBody>
+      </p:sp>
+      <p:pic>
+        <p:nvPicPr>
+          <p:cNvPr id="4" name="Picture 3" descr="inside_circle_logo.png"/>
+          <p:cNvPicPr>
+            <a:picLocks noChangeAspect="1"/>
+          </p:cNvPicPr>
+          <p:nvPr/>
+        </p:nvPicPr>
+        <p:blipFill>
+          <a:blip r:embed="rId2"/>
+          <a:stretch>
+            <a:fillRect/>
+          </a:stretch>
+        </p:blipFill>
+        <p:spPr>
+          <a:xfrm>
+            <a:off x="10660000" y="130000"/>
+            <a:ext cx="1302000" cy="420000"/>
+          </a:xfrm>
+          <a:prstGeom prst="rect">
+            <a:avLst/>
+          </a:prstGeom>
+        </p:spPr>
+      </p:pic>
+      <p:sp>
+        <p:nvSpPr>
+          <p:cNvPr id="5" name="TextBox 4"/>
+          <p:cNvSpPr txBox="1"/>
+          <p:nvPr/>
+        </p:nvSpPr>
+        <p:spPr>
+          <a:xfrm>
+            <a:off x="228600" y="240000"/>
+            <a:ext cx="3842800" cy="1300000"/>
+          </a:xfrm>
+          <a:prstGeom prst="rect">
+            <a:avLst/>
+          </a:prstGeom>
+          <a:noFill/>
+        </p:spPr>
+        <p:txBody>
+          <a:bodyPr wrap="square" lIns="0" rIns="0" tIns="0" bIns="0">
+            <a:spAutoFit/>
+          </a:bodyPr>
+          <a:lstStyle/>
+          <a:p>
+            <a:pPr algn="l"/>
+            <a:r>
+              <a:rPr sz="2800" b="0" i="0">
+                <a:solidFill>
+                  <a:srgbClr val="3AEDE5"/>
+                </a:solidFill>
+                <a:latin typeface="Alegreya Sans"/>
+              </a:rPr>
+              <a:t>Raoul Loïc</a:t>
+            </a:r>
+          </a:p>
+          <a:p>
+            <a:pPr>
+              <a:spcBef>
+                <a:spcPts val="0"/>
+              </a:spcBef>
+            </a:pPr>
+            <a:r>
+              <a:rPr sz="3200" b="1" i="0">
+                <a:solidFill>
+                  <a:srgbClr val="3AEDE5"/>
+                </a:solidFill>
+                <a:latin typeface="Alegreya Sans"/>
+              </a:rPr>
+              <a:t>TSATCHOU</a:t>
+            </a:r>
+          </a:p>
+        </p:txBody>
+      </p:sp>
+      <p:sp>
+        <p:nvSpPr>
+          <p:cNvPr id="6" name="TextBox 5"/>
+          <p:cNvSpPr txBox="1"/>
+          <p:nvPr/>
+        </p:nvSpPr>
+        <p:spPr>
+          <a:xfrm>
+            <a:off x="4528600" y="300000"/>
+            <a:ext cx="5963400" cy="800000"/>
+          </a:xfrm>
+          <a:prstGeom prst="rect">
+            <a:avLst/>
+          </a:prstGeom>
+          <a:noFill/>
+        </p:spPr>
+        <p:txBody>
+          <a:bodyPr wrap="square" lIns="0" rIns="0" tIns="0" bIns="0">
+            <a:spAutoFit/>
+          </a:bodyPr>
+          <a:lstStyle/>
+          <a:p>
+            <a:r>
+              <a:rPr sz="2400" b="1" i="0">
+                <a:solidFill>
+                  <a:srgbClr val="FFFFFF"/>
+                </a:solidFill>
+                <a:latin typeface="Alegreya Sans"/>
+              </a:rPr>
+              <a:t>Chef de Projet MOA — Risques &amp; Réglementaire Bancaire (suite)</a:t>
+            </a:r>
+          </a:p>
+          <a:p>
+            <a:pPr>
+              <a:spcBef>
+                <a:spcPts val="200"/>
+              </a:spcBef>
+            </a:pPr>
+            <a:r>
+              <a:rPr sz="1500" b="0" i="1">
+                <a:solidFill>
+                  <a:srgbClr val="3AEDE5"/>
+                </a:solidFill>
+                <a:latin typeface="Alegreya Sans"/>
+              </a:rPr>
+              <a:t>Risque de crédit, qualité des données (BCBS 239), Bâle IV / CRR III</a:t>
+            </a:r>
+          </a:p>
+        </p:txBody>
+      </p:sp>
+      <p:sp>
+        <p:nvSpPr>
+          <p:cNvPr id="7" name="TextBox 6"/>
+          <p:cNvSpPr txBox="1"/>
+          <p:nvPr/>
+        </p:nvSpPr>
+        <p:spPr>
+          <a:xfrm>
+            <a:off x="228600" y="1180000"/>
+            <a:ext cx="3842800" cy="5318000"/>
+          </a:xfrm>
+          <a:prstGeom prst="rect">
+            <a:avLst/>
+          </a:prstGeom>
+          <a:noFill/>
+        </p:spPr>
+        <p:txBody>
+          <a:bodyPr wrap="square" lIns="0" rIns="0" tIns="0" bIns="0">
+            <a:spAutoFit/>
+          </a:bodyPr>
+          <a:lstStyle/>
+          <a:p>
+            <a:pPr algn="l">
+              <a:spcAft>
+                <a:spcPts val="300"/>
+              </a:spcAft>
+            </a:pPr>
+            <a:r>
+              <a:rPr sz="1300" b="1" i="0">
+                <a:solidFill>
+                  <a:srgbClr val="3AEDE5"/>
+                </a:solidFill>
+                <a:latin typeface="Alegreya Sans"/>
+              </a:rPr>
+              <a:t>DOMAINES D'EXPERTISE</a:t>
+            </a:r>
+          </a:p>
+          <a:p>
+            <a:pPr algn="l">
+              <a:spcAft>
+                <a:spcPts val="100"/>
+              </a:spcAft>
+            </a:pPr>
+            <a:r>
+              <a:rPr sz="1200" b="1" i="0">
+                <a:solidFill>
+                  <a:srgbClr val="3AEDE5"/>
+                </a:solidFill>
+                <a:latin typeface="Alegreya Sans"/>
+              </a:rPr>
+              <a:t>•  </a:t>
+            </a:r>
+            <a:r>
+              <a:rPr sz="1200" b="0" i="0">
+                <a:solidFill>
+                  <a:srgbClr val="FFFFFF"/>
+                </a:solidFill>
+                <a:latin typeface="Alegreya Sans"/>
+              </a:rPr>
+              <a:t>Réglementation financière : Bâle IV, CRR III, Stress Tests, NDOD, Taxonomie, Pilier 3 ESG</a:t>
+            </a:r>
+          </a:p>
+          <a:p>
+            <a:pPr algn="l">
+              <a:spcAft>
+                <a:spcPts val="100"/>
+              </a:spcAft>
+            </a:pPr>
+            <a:r>
+              <a:rPr sz="1200" b="1" i="0">
+                <a:solidFill>
+                  <a:srgbClr val="3AEDE5"/>
+                </a:solidFill>
+                <a:latin typeface="Alegreya Sans"/>
+              </a:rPr>
+              <a:t>•  </a:t>
+            </a:r>
+            <a:r>
+              <a:rPr sz="1200" b="0" i="0">
+                <a:solidFill>
+                  <a:srgbClr val="FFFFFF"/>
+                </a:solidFill>
+                <a:latin typeface="Alegreya Sans"/>
+              </a:rPr>
+              <a:t>Risque de crédit</a:t>
+            </a:r>
+          </a:p>
+          <a:p>
+            <a:pPr algn="l">
+              <a:spcAft>
+                <a:spcPts val="100"/>
+              </a:spcAft>
+            </a:pPr>
+            <a:r>
+              <a:rPr sz="1200" b="1" i="0">
+                <a:solidFill>
+                  <a:srgbClr val="3AEDE5"/>
+                </a:solidFill>
+                <a:latin typeface="Alegreya Sans"/>
+              </a:rPr>
+              <a:t>•  </a:t>
+            </a:r>
+            <a:r>
+              <a:rPr sz="1200" b="0" i="0">
+                <a:solidFill>
+                  <a:srgbClr val="FFFFFF"/>
+                </a:solidFill>
+                <a:latin typeface="Alegreya Sans"/>
+              </a:rPr>
+              <a:t>Qualité des données (BCBS 239)</a:t>
+            </a:r>
+          </a:p>
+          <a:p>
+            <a:pPr algn="l">
+              <a:spcAft>
+                <a:spcPts val="100"/>
+              </a:spcAft>
+            </a:pPr>
+            <a:r>
+              <a:rPr sz="1200" b="1" i="0">
+                <a:solidFill>
+                  <a:srgbClr val="3AEDE5"/>
+                </a:solidFill>
+                <a:latin typeface="Alegreya Sans"/>
+              </a:rPr>
+              <a:t>•  </a:t>
+            </a:r>
+            <a:r>
+              <a:rPr sz="1200" b="0" i="0">
+                <a:solidFill>
+                  <a:srgbClr val="FFFFFF"/>
+                </a:solidFill>
+                <a:latin typeface="Alegreya Sans"/>
+              </a:rPr>
+              <a:t>Chef de projet / gestion de projet</a:t>
+            </a:r>
+          </a:p>
+          <a:p>
+            <a:pPr algn="l">
+              <a:spcAft>
+                <a:spcPts val="100"/>
+              </a:spcAft>
+            </a:pPr>
+            <a:r>
+              <a:rPr sz="1200" b="1" i="0">
+                <a:solidFill>
+                  <a:srgbClr val="3AEDE5"/>
+                </a:solidFill>
+                <a:latin typeface="Alegreya Sans"/>
+              </a:rPr>
+              <a:t>•  </a:t>
+            </a:r>
+            <a:r>
+              <a:rPr sz="1200" b="0" i="0">
+                <a:solidFill>
+                  <a:srgbClr val="FFFFFF"/>
+                </a:solidFill>
+                <a:latin typeface="Alegreya Sans"/>
+              </a:rPr>
+              <a:t>MOA : expression de besoin, spécifications fonctionnelles, recette</a:t>
+            </a:r>
+          </a:p>
+          <a:p>
+            <a:pPr algn="l">
+              <a:spcAft>
+                <a:spcPts val="100"/>
+              </a:spcAft>
+            </a:pPr>
+            <a:r>
+              <a:rPr sz="1200" b="1" i="0">
+                <a:solidFill>
+                  <a:srgbClr val="3AEDE5"/>
+                </a:solidFill>
+                <a:latin typeface="Alegreya Sans"/>
+              </a:rPr>
+              <a:t>•  </a:t>
+            </a:r>
+            <a:r>
+              <a:rPr sz="1200" b="0" i="0">
+                <a:solidFill>
+                  <a:srgbClr val="FFFFFF"/>
+                </a:solidFill>
+                <a:latin typeface="Alegreya Sans"/>
+              </a:rPr>
+              <a:t>Outils : MS Office, VBA, SQL, Power BI, JIRA</a:t>
+            </a:r>
+          </a:p>
+        </p:txBody>
+      </p:sp>
+      <p:sp>
+        <p:nvSpPr>
+          <p:cNvPr id="8" name="TextBox 7"/>
+          <p:cNvSpPr txBox="1"/>
+          <p:nvPr/>
+        </p:nvSpPr>
+        <p:spPr>
+          <a:xfrm>
+            <a:off x="4528600" y="1180000"/>
+            <a:ext cx="7434800" cy="5318000"/>
+          </a:xfrm>
+          <a:prstGeom prst="rect">
+            <a:avLst/>
+          </a:prstGeom>
+          <a:noFill/>
+        </p:spPr>
+        <p:txBody>
+          <a:bodyPr wrap="square" lIns="0" rIns="0" tIns="0" bIns="0">
+            <a:spAutoFit/>
+          </a:bodyPr>
+          <a:lstStyle/>
+          <a:p>
+            <a:pPr algn="l">
+              <a:spcAft>
+                <a:spcPts val="300"/>
+              </a:spcAft>
+            </a:pPr>
+            <a:r>
+              <a:rPr sz="1300" b="1" i="0">
+                <a:solidFill>
+                  <a:srgbClr val="3AEDE5"/>
+                </a:solidFill>
+                <a:latin typeface="Alegreya Sans"/>
+              </a:rPr>
+              <a:t>PRINCIPALES EXPÉRIENCES PROFESSIONNELLES (suite)</a:t>
+            </a:r>
+          </a:p>
+          <a:p>
+            <a:pPr algn="l">
+              <a:spcAft>
+                <a:spcPts val="100"/>
+              </a:spcAft>
+            </a:pPr>
+            <a:r>
+              <a:rPr sz="1200" b="1" i="0">
+                <a:solidFill>
+                  <a:srgbClr val="3AEDE5"/>
+                </a:solidFill>
+                <a:latin typeface="Alegreya Sans"/>
+              </a:rPr>
+              <a:t>▸ </a:t>
+            </a:r>
+            <a:r>
+              <a:rPr sz="1200" b="1" i="0">
+                <a:solidFill>
+                  <a:srgbClr val="FFFFFF"/>
+                </a:solidFill>
+                <a:latin typeface="Alegreya Sans"/>
+              </a:rPr>
+              <a:t>BNP Paribas — BCBS 239</a:t>
+            </a:r>
+            <a:r>
+              <a:rPr sz="1200" b="0" i="0">
+                <a:solidFill>
+                  <a:srgbClr val="FFFFFF"/>
+                </a:solidFill>
+                <a:latin typeface="Alegreya Sans"/>
+              </a:rPr>
+              <a:t> — Conformité Groupe &amp; qualité des données Risques (EY)</a:t>
+            </a:r>
+            <a:r>
+              <a:rPr sz="1200" b="0" i="1">
+                <a:solidFill>
+                  <a:srgbClr val="3AEDE5"/>
+                </a:solidFill>
+                <a:latin typeface="Alegreya Sans"/>
+              </a:rPr>
+              <a:t>  (8 mois)</a:t>
+            </a:r>
+          </a:p>
+          <a:p>
+            <a:pPr algn="l" lvl="1">
+              <a:spcAft>
+                <a:spcPts val="100"/>
+              </a:spcAft>
+            </a:pPr>
+            <a:r>
+              <a:rPr sz="1200" b="1" i="0">
+                <a:solidFill>
+                  <a:srgbClr val="3AEDE5"/>
+                </a:solidFill>
+                <a:latin typeface="Alegreya Sans"/>
+              </a:rPr>
+              <a:t>•  </a:t>
+            </a:r>
+            <a:r>
+              <a:rPr sz="1200" b="0" i="0">
+                <a:solidFill>
+                  <a:srgbClr val="FFFFFF"/>
+                </a:solidFill>
+                <a:latin typeface="Alegreya Sans"/>
+              </a:rPr>
+              <a:t>Mise en place d'un processus d'évaluation de la conformité du Groupe aux principes BCBS 239.</a:t>
+            </a:r>
+          </a:p>
+          <a:p>
+            <a:pPr algn="l" lvl="1">
+              <a:spcAft>
+                <a:spcPts val="100"/>
+              </a:spcAft>
+            </a:pPr>
+            <a:r>
+              <a:rPr sz="1200" b="1" i="0">
+                <a:solidFill>
+                  <a:srgbClr val="3AEDE5"/>
+                </a:solidFill>
+                <a:latin typeface="Alegreya Sans"/>
+              </a:rPr>
+              <a:t>•  </a:t>
+            </a:r>
+            <a:r>
+              <a:rPr sz="1200" b="0" i="0">
+                <a:solidFill>
+                  <a:srgbClr val="FFFFFF"/>
+                </a:solidFill>
+                <a:latin typeface="Alegreya Sans"/>
+              </a:rPr>
+              <a:t>Suivi de la mise en œuvre du plan de remédiation des recommandations (BCE, Inspection générale, revue indépendante) relatives à la qualité des données Risques sur le périmètre Risque / Finance.</a:t>
+            </a:r>
+          </a:p>
+          <a:p>
+            <a:pPr algn="l" lvl="1">
+              <a:spcAft>
+                <a:spcPts val="100"/>
+              </a:spcAft>
+            </a:pPr>
+            <a:r>
+              <a:rPr sz="1200" b="1" i="0">
+                <a:solidFill>
+                  <a:srgbClr val="3AEDE5"/>
+                </a:solidFill>
+                <a:latin typeface="Alegreya Sans"/>
+              </a:rPr>
+              <a:t>•  </a:t>
+            </a:r>
+            <a:r>
+              <a:rPr sz="1200" b="0" i="0">
+                <a:solidFill>
+                  <a:srgbClr val="FFFFFF"/>
+                </a:solidFill>
+                <a:latin typeface="Alegreya Sans"/>
+              </a:rPr>
+              <a:t>Contribution à la production de la documentation ICAAP sur les sujets d'agrégation de données Risques.</a:t>
+            </a:r>
+          </a:p>
+          <a:p>
+            <a:pPr algn="l" lvl="1">
+              <a:spcAft>
+                <a:spcPts val="100"/>
+              </a:spcAft>
+            </a:pPr>
+            <a:r>
+              <a:rPr sz="1200" b="1" i="0">
+                <a:solidFill>
+                  <a:srgbClr val="3AEDE5"/>
+                </a:solidFill>
+                <a:latin typeface="Alegreya Sans"/>
+              </a:rPr>
+              <a:t>•  </a:t>
+            </a:r>
+            <a:r>
+              <a:rPr sz="1200" b="0" i="0">
+                <a:solidFill>
+                  <a:srgbClr val="FFFFFF"/>
+                </a:solidFill>
+                <a:latin typeface="Alegreya Sans"/>
+              </a:rPr>
+              <a:t>Production du corpus documentaire sur les principes mis en place autour de la gestion de la qualité des données.</a:t>
+            </a:r>
+          </a:p>
+          <a:p>
+            <a:pPr algn="l">
+              <a:spcAft>
+                <a:spcPts val="100"/>
+              </a:spcAft>
+            </a:pPr>
+            <a:r>
+              <a:rPr sz="1200" b="1" i="0">
+                <a:solidFill>
+                  <a:srgbClr val="3AEDE5"/>
+                </a:solidFill>
+                <a:latin typeface="Alegreya Sans"/>
+              </a:rPr>
+              <a:t>▸ </a:t>
+            </a:r>
+            <a:r>
+              <a:rPr sz="1200" b="1" i="0">
+                <a:solidFill>
+                  <a:srgbClr val="FFFFFF"/>
+                </a:solidFill>
+                <a:latin typeface="Alegreya Sans"/>
+              </a:rPr>
+              <a:t>BNP Paribas Personal Finance — BCBS 239</a:t>
+            </a:r>
+            <a:r>
+              <a:rPr sz="1200" b="0" i="0">
+                <a:solidFill>
+                  <a:srgbClr val="FFFFFF"/>
+                </a:solidFill>
+                <a:latin typeface="Alegreya Sans"/>
+              </a:rPr>
+              <a:t> — Qualité des données Risques (EY)</a:t>
+            </a:r>
+            <a:r>
+              <a:rPr sz="1200" b="0" i="1">
+                <a:solidFill>
+                  <a:srgbClr val="3AEDE5"/>
+                </a:solidFill>
+                <a:latin typeface="Alegreya Sans"/>
+              </a:rPr>
+              <a:t>  (15 mois)</a:t>
+            </a:r>
+          </a:p>
+          <a:p>
+            <a:pPr algn="l" lvl="1">
+              <a:spcAft>
+                <a:spcPts val="100"/>
+              </a:spcAft>
+            </a:pPr>
+            <a:r>
+              <a:rPr sz="1200" b="1" i="0">
+                <a:solidFill>
+                  <a:srgbClr val="3AEDE5"/>
+                </a:solidFill>
+                <a:latin typeface="Alegreya Sans"/>
+              </a:rPr>
+              <a:t>•  </a:t>
+            </a:r>
+            <a:r>
+              <a:rPr sz="1200" b="0" i="0">
+                <a:solidFill>
+                  <a:srgbClr val="FFFFFF"/>
+                </a:solidFill>
+                <a:latin typeface="Alegreya Sans"/>
+              </a:rPr>
+              <a:t>Coordination de la production des livrables data quality pour l'ensemble des entités appartenant au scope de travaux.</a:t>
+            </a:r>
+          </a:p>
+          <a:p>
+            <a:pPr algn="l" lvl="1">
+              <a:spcAft>
+                <a:spcPts val="100"/>
+              </a:spcAft>
+            </a:pPr>
+            <a:r>
+              <a:rPr sz="1200" b="1" i="0">
+                <a:solidFill>
+                  <a:srgbClr val="3AEDE5"/>
+                </a:solidFill>
+                <a:latin typeface="Alegreya Sans"/>
+              </a:rPr>
+              <a:t>•  </a:t>
+            </a:r>
+            <a:r>
+              <a:rPr sz="1200" b="0" i="0">
+                <a:solidFill>
+                  <a:srgbClr val="FFFFFF"/>
+                </a:solidFill>
+                <a:latin typeface="Alegreya Sans"/>
+              </a:rPr>
+              <a:t>Gestion de projet (PMO) : planification, préparation, animation et rédaction de comptes-rendus de comités, on-boarding des stakeholders, suivi et consolidation budgétaire.</a:t>
+            </a:r>
+          </a:p>
+          <a:p>
+            <a:pPr algn="l" lvl="1">
+              <a:spcAft>
+                <a:spcPts val="100"/>
+              </a:spcAft>
+            </a:pPr>
+            <a:r>
+              <a:rPr sz="1200" b="1" i="0">
+                <a:solidFill>
+                  <a:srgbClr val="3AEDE5"/>
+                </a:solidFill>
+                <a:latin typeface="Alegreya Sans"/>
+              </a:rPr>
+              <a:t>•  </a:t>
+            </a:r>
+            <a:r>
+              <a:rPr sz="1200" b="0" i="0">
+                <a:solidFill>
+                  <a:srgbClr val="FFFFFF"/>
+                </a:solidFill>
+                <a:latin typeface="Alegreya Sans"/>
+              </a:rPr>
+              <a:t>Production de rapports d'avancement : mise à jour des KPI, remontée des alertes, suivi budgétaire ; corpus documentaire du Data Quality Framework.</a:t>
+            </a:r>
+          </a:p>
+        </p:txBody>
+      </p:sp>
+      <p:sp>
+        <p:nvSpPr>
+          <p:cNvPr id="9" name="Rectangle 8"/>
+          <p:cNvSpPr/>
+          <p:nvPr/>
+        </p:nvSpPr>
+        <p:spPr>
+          <a:xfrm>
+            <a:off x="0" y="6578000"/>
+            <a:ext cx="12192000" cy="280000"/>
+          </a:xfrm>
+          <a:prstGeom prst="rect">
+            <a:avLst/>
+          </a:prstGeom>
+          <a:solidFill>
+            <a:srgbClr val="061A5E"/>
+          </a:solidFill>
+          <a:ln>
+            <a:noFill/>
+          </a:ln>
+          <a:effectLst/>
+        </p:spPr>
+        <p:style>
+          <a:lnRef idx="1">
+            <a:schemeClr val="accent1"/>
+          </a:lnRef>
+          <a:fillRef idx="3">
+            <a:schemeClr val="accent1"/>
+          </a:fillRef>
+          <a:effectRef idx="2">
+            <a:schemeClr val="accent1"/>
+          </a:effectRef>
+          <a:fontRef idx="minor">
+            <a:schemeClr val="lt1"/>
+          </a:fontRef>
+        </p:style>
+        <p:txBody>
+          <a:bodyPr rtlCol="0" anchor="ctr"/>
+          <a:lstStyle/>
+          <a:p>
+            <a:pPr algn="ctr"/>
+          </a:p>
+        </p:txBody>
+      </p:sp>
+      <p:sp>
+        <p:nvSpPr>
+          <p:cNvPr id="10" name="TextBox 9"/>
+          <p:cNvSpPr txBox="1"/>
+          <p:nvPr/>
+        </p:nvSpPr>
+        <p:spPr>
+          <a:xfrm>
+            <a:off x="228600" y="6578000"/>
+            <a:ext cx="11734800" cy="280000"/>
+          </a:xfrm>
+          <a:prstGeom prst="rect">
+            <a:avLst/>
+          </a:prstGeom>
+          <a:noFill/>
+        </p:spPr>
+        <p:txBody>
+          <a:bodyPr wrap="square" lIns="0" rIns="0" tIns="0" bIns="0">
+            <a:spAutoFit/>
+          </a:bodyPr>
+          <a:lstStyle/>
+          <a:p>
+            <a:pPr algn="ctr"/>
+            <a:r>
+              <a:rPr sz="1000" b="0" i="1">
+                <a:solidFill>
+                  <a:srgbClr val="CCD6E8"/>
+                </a:solidFill>
+                <a:latin typeface="Alegreya Sans"/>
+              </a:rPr>
+              <a:t>Les informations de ce document sont strictement confidentielles — Ce document ne peut être partagé qu'avec l'accord de son propriétaire</a:t>
+            </a:r>
+          </a:p>
+        </p:txBody>
+      </p:sp>
+    </p:spTree>
+  </p:cSld>
+  <p:clrMapOvr>
+    <a:masterClrMapping/>
+  </p:clrMapOvr>
+</p:sld>
+</file>
+
+<file path=ppt/slides/slide5.xml><?xml version="1.0" encoding="utf-8"?>
+<p:sld xmlns:a="http://schemas.openxmlformats.org/drawingml/2006/main" xmlns:p="http://schemas.openxmlformats.org/presentationml/2006/main" xmlns:r="http://schemas.openxmlformats.org/officeDocument/2006/relationships">
+  <p:cSld>
+    <p:spTree>
+      <p:nvGrpSpPr>
+        <p:cNvPr id="1" name=""/>
+        <p:cNvGrpSpPr/>
+        <p:nvPr/>
+      </p:nvGrpSpPr>
+      <p:grpSpPr/>
+      <p:sp>
+        <p:nvSpPr>
+          <p:cNvPr id="2" name="Rectangle 1"/>
+          <p:cNvSpPr/>
+          <p:nvPr/>
+        </p:nvSpPr>
+        <p:spPr>
+          <a:xfrm>
+            <a:off x="0" y="0"/>
+            <a:ext cx="12192000" cy="6858000"/>
+          </a:xfrm>
+          <a:prstGeom prst="rect">
+            <a:avLst/>
+          </a:prstGeom>
+          <a:solidFill>
+            <a:srgbClr val="061A5E"/>
+          </a:solidFill>
+          <a:ln>
+            <a:noFill/>
+          </a:ln>
+          <a:effectLst/>
+        </p:spPr>
+        <p:style>
+          <a:lnRef idx="1">
+            <a:schemeClr val="accent1"/>
+          </a:lnRef>
+          <a:fillRef idx="3">
+            <a:schemeClr val="accent1"/>
+          </a:fillRef>
+          <a:effectRef idx="2">
+            <a:schemeClr val="accent1"/>
+          </a:effectRef>
+          <a:fontRef idx="minor">
+            <a:schemeClr val="lt1"/>
+          </a:fontRef>
+        </p:style>
+        <p:txBody>
+          <a:bodyPr rtlCol="0" anchor="ctr"/>
+          <a:lstStyle/>
+          <a:p>
+            <a:pPr algn="ctr"/>
+          </a:p>
+        </p:txBody>
+      </p:sp>
+      <p:sp>
+        <p:nvSpPr>
+          <p:cNvPr id="3" name="Rectangle 2"/>
+          <p:cNvSpPr/>
+          <p:nvPr/>
+        </p:nvSpPr>
+        <p:spPr>
+          <a:xfrm>
+            <a:off x="4300000" y="0"/>
+            <a:ext cx="15000" cy="6858000"/>
+          </a:xfrm>
+          <a:prstGeom prst="rect">
+            <a:avLst/>
+          </a:prstGeom>
+          <a:solidFill>
+            <a:srgbClr val="3AEDE5"/>
+          </a:solidFill>
+          <a:ln>
+            <a:noFill/>
+          </a:ln>
+          <a:effectLst/>
+        </p:spPr>
+        <p:style>
+          <a:lnRef idx="1">
+            <a:schemeClr val="accent1"/>
+          </a:lnRef>
+          <a:fillRef idx="3">
+            <a:schemeClr val="accent1"/>
+          </a:fillRef>
+          <a:effectRef idx="2">
+            <a:schemeClr val="accent1"/>
+          </a:effectRef>
+          <a:fontRef idx="minor">
+            <a:schemeClr val="lt1"/>
+          </a:fontRef>
+        </p:style>
+        <p:txBody>
+          <a:bodyPr rtlCol="0" anchor="ctr"/>
+          <a:lstStyle/>
+          <a:p>
+            <a:pPr algn="ctr"/>
+          </a:p>
+        </p:txBody>
+      </p:sp>
+      <p:pic>
+        <p:nvPicPr>
+          <p:cNvPr id="4" name="Picture 3" descr="inside_circle_logo.png"/>
+          <p:cNvPicPr>
+            <a:picLocks noChangeAspect="1"/>
+          </p:cNvPicPr>
+          <p:nvPr/>
+        </p:nvPicPr>
+        <p:blipFill>
+          <a:blip r:embed="rId2"/>
+          <a:stretch>
+            <a:fillRect/>
+          </a:stretch>
+        </p:blipFill>
+        <p:spPr>
+          <a:xfrm>
+            <a:off x="10660000" y="130000"/>
+            <a:ext cx="1302000" cy="420000"/>
+          </a:xfrm>
+          <a:prstGeom prst="rect">
+            <a:avLst/>
+          </a:prstGeom>
+        </p:spPr>
+      </p:pic>
+      <p:sp>
+        <p:nvSpPr>
+          <p:cNvPr id="5" name="TextBox 4"/>
+          <p:cNvSpPr txBox="1"/>
+          <p:nvPr/>
+        </p:nvSpPr>
+        <p:spPr>
+          <a:xfrm>
+            <a:off x="228600" y="240000"/>
+            <a:ext cx="3842800" cy="1300000"/>
+          </a:xfrm>
+          <a:prstGeom prst="rect">
+            <a:avLst/>
+          </a:prstGeom>
+          <a:noFill/>
+        </p:spPr>
+        <p:txBody>
+          <a:bodyPr wrap="square" lIns="0" rIns="0" tIns="0" bIns="0">
+            <a:spAutoFit/>
+          </a:bodyPr>
+          <a:lstStyle/>
+          <a:p>
+            <a:pPr algn="l"/>
+            <a:r>
+              <a:rPr sz="2800" b="0" i="0">
+                <a:solidFill>
+                  <a:srgbClr val="3AEDE5"/>
+                </a:solidFill>
+                <a:latin typeface="Alegreya Sans"/>
+              </a:rPr>
+              <a:t>Raoul Loïc</a:t>
+            </a:r>
+          </a:p>
+          <a:p>
+            <a:pPr>
+              <a:spcBef>
+                <a:spcPts val="0"/>
+              </a:spcBef>
+            </a:pPr>
+            <a:r>
+              <a:rPr sz="3200" b="1" i="0">
+                <a:solidFill>
+                  <a:srgbClr val="3AEDE5"/>
+                </a:solidFill>
+                <a:latin typeface="Alegreya Sans"/>
+              </a:rPr>
+              <a:t>TSATCHOU</a:t>
+            </a:r>
+          </a:p>
+        </p:txBody>
+      </p:sp>
+      <p:sp>
+        <p:nvSpPr>
+          <p:cNvPr id="6" name="TextBox 5"/>
+          <p:cNvSpPr txBox="1"/>
+          <p:nvPr/>
+        </p:nvSpPr>
+        <p:spPr>
+          <a:xfrm>
+            <a:off x="4528600" y="300000"/>
+            <a:ext cx="5963400" cy="800000"/>
+          </a:xfrm>
+          <a:prstGeom prst="rect">
+            <a:avLst/>
+          </a:prstGeom>
+          <a:noFill/>
+        </p:spPr>
+        <p:txBody>
+          <a:bodyPr wrap="square" lIns="0" rIns="0" tIns="0" bIns="0">
+            <a:spAutoFit/>
+          </a:bodyPr>
+          <a:lstStyle/>
+          <a:p>
+            <a:r>
+              <a:rPr sz="2400" b="1" i="0">
+                <a:solidFill>
+                  <a:srgbClr val="FFFFFF"/>
+                </a:solidFill>
+                <a:latin typeface="Alegreya Sans"/>
+              </a:rPr>
+              <a:t>Chef de Projet MOA — Risques &amp; Réglementaire Bancaire (suite)</a:t>
+            </a:r>
+          </a:p>
+          <a:p>
+            <a:pPr>
+              <a:spcBef>
+                <a:spcPts val="200"/>
+              </a:spcBef>
+            </a:pPr>
+            <a:r>
+              <a:rPr sz="1500" b="0" i="1">
+                <a:solidFill>
+                  <a:srgbClr val="3AEDE5"/>
+                </a:solidFill>
+                <a:latin typeface="Alegreya Sans"/>
+              </a:rPr>
+              <a:t>Risque de crédit, qualité des données (BCBS 239), Bâle IV / CRR III</a:t>
+            </a:r>
+          </a:p>
+        </p:txBody>
+      </p:sp>
+      <p:sp>
+        <p:nvSpPr>
+          <p:cNvPr id="7" name="TextBox 6"/>
+          <p:cNvSpPr txBox="1"/>
+          <p:nvPr/>
+        </p:nvSpPr>
+        <p:spPr>
+          <a:xfrm>
+            <a:off x="228600" y="1180000"/>
+            <a:ext cx="3842800" cy="5318000"/>
+          </a:xfrm>
+          <a:prstGeom prst="rect">
+            <a:avLst/>
+          </a:prstGeom>
+          <a:noFill/>
+        </p:spPr>
+        <p:txBody>
+          <a:bodyPr wrap="square" lIns="0" rIns="0" tIns="0" bIns="0">
+            <a:spAutoFit/>
+          </a:bodyPr>
+          <a:lstStyle/>
+          <a:p>
+            <a:pPr algn="l">
+              <a:spcAft>
+                <a:spcPts val="300"/>
+              </a:spcAft>
+            </a:pPr>
+            <a:r>
+              <a:rPr sz="1300" b="1" i="0">
+                <a:solidFill>
+                  <a:srgbClr val="3AEDE5"/>
+                </a:solidFill>
+                <a:latin typeface="Alegreya Sans"/>
+              </a:rPr>
+              <a:t>DOMAINES D'EXPERTISE</a:t>
+            </a:r>
+          </a:p>
+          <a:p>
+            <a:pPr algn="l">
+              <a:spcAft>
+                <a:spcPts val="100"/>
+              </a:spcAft>
+            </a:pPr>
+            <a:r>
+              <a:rPr sz="1200" b="1" i="0">
+                <a:solidFill>
+                  <a:srgbClr val="3AEDE5"/>
+                </a:solidFill>
+                <a:latin typeface="Alegreya Sans"/>
+              </a:rPr>
+              <a:t>•  </a:t>
+            </a:r>
+            <a:r>
+              <a:rPr sz="1200" b="0" i="0">
+                <a:solidFill>
+                  <a:srgbClr val="FFFFFF"/>
+                </a:solidFill>
+                <a:latin typeface="Alegreya Sans"/>
+              </a:rPr>
+              <a:t>Réglementation financière : Bâle IV, CRR III, Stress Tests, NDOD, Taxonomie, Pilier 3 ESG</a:t>
+            </a:r>
+          </a:p>
+          <a:p>
+            <a:pPr algn="l">
+              <a:spcAft>
+                <a:spcPts val="100"/>
+              </a:spcAft>
+            </a:pPr>
+            <a:r>
+              <a:rPr sz="1200" b="1" i="0">
+                <a:solidFill>
+                  <a:srgbClr val="3AEDE5"/>
+                </a:solidFill>
+                <a:latin typeface="Alegreya Sans"/>
+              </a:rPr>
+              <a:t>•  </a:t>
+            </a:r>
+            <a:r>
+              <a:rPr sz="1200" b="0" i="0">
+                <a:solidFill>
+                  <a:srgbClr val="FFFFFF"/>
+                </a:solidFill>
+                <a:latin typeface="Alegreya Sans"/>
+              </a:rPr>
+              <a:t>Risque de crédit</a:t>
+            </a:r>
+          </a:p>
+          <a:p>
+            <a:pPr algn="l">
+              <a:spcAft>
+                <a:spcPts val="100"/>
+              </a:spcAft>
+            </a:pPr>
+            <a:r>
+              <a:rPr sz="1200" b="1" i="0">
+                <a:solidFill>
+                  <a:srgbClr val="3AEDE5"/>
+                </a:solidFill>
+                <a:latin typeface="Alegreya Sans"/>
+              </a:rPr>
+              <a:t>•  </a:t>
+            </a:r>
+            <a:r>
+              <a:rPr sz="1200" b="0" i="0">
+                <a:solidFill>
+                  <a:srgbClr val="FFFFFF"/>
+                </a:solidFill>
+                <a:latin typeface="Alegreya Sans"/>
+              </a:rPr>
+              <a:t>Qualité des données (BCBS 239)</a:t>
+            </a:r>
+          </a:p>
+          <a:p>
+            <a:pPr algn="l">
+              <a:spcAft>
+                <a:spcPts val="100"/>
+              </a:spcAft>
+            </a:pPr>
+            <a:r>
+              <a:rPr sz="1200" b="1" i="0">
+                <a:solidFill>
+                  <a:srgbClr val="3AEDE5"/>
+                </a:solidFill>
+                <a:latin typeface="Alegreya Sans"/>
+              </a:rPr>
+              <a:t>•  </a:t>
+            </a:r>
+            <a:r>
+              <a:rPr sz="1200" b="0" i="0">
+                <a:solidFill>
+                  <a:srgbClr val="FFFFFF"/>
+                </a:solidFill>
+                <a:latin typeface="Alegreya Sans"/>
+              </a:rPr>
+              <a:t>Chef de projet / gestion de projet</a:t>
+            </a:r>
+          </a:p>
+          <a:p>
+            <a:pPr algn="l">
+              <a:spcAft>
+                <a:spcPts val="100"/>
+              </a:spcAft>
+            </a:pPr>
+            <a:r>
+              <a:rPr sz="1200" b="1" i="0">
+                <a:solidFill>
+                  <a:srgbClr val="3AEDE5"/>
+                </a:solidFill>
+                <a:latin typeface="Alegreya Sans"/>
+              </a:rPr>
+              <a:t>•  </a:t>
+            </a:r>
+            <a:r>
+              <a:rPr sz="1200" b="0" i="0">
+                <a:solidFill>
+                  <a:srgbClr val="FFFFFF"/>
+                </a:solidFill>
+                <a:latin typeface="Alegreya Sans"/>
+              </a:rPr>
+              <a:t>MOA : expression de besoin, spécifications fonctionnelles, recette</a:t>
+            </a:r>
+          </a:p>
+          <a:p>
+            <a:pPr algn="l">
+              <a:spcAft>
+                <a:spcPts val="100"/>
+              </a:spcAft>
+            </a:pPr>
+            <a:r>
+              <a:rPr sz="1200" b="1" i="0">
+                <a:solidFill>
+                  <a:srgbClr val="3AEDE5"/>
+                </a:solidFill>
+                <a:latin typeface="Alegreya Sans"/>
+              </a:rPr>
+              <a:t>•  </a:t>
+            </a:r>
+            <a:r>
+              <a:rPr sz="1200" b="0" i="0">
+                <a:solidFill>
+                  <a:srgbClr val="FFFFFF"/>
+                </a:solidFill>
+                <a:latin typeface="Alegreya Sans"/>
+              </a:rPr>
+              <a:t>Outils : MS Office, VBA, SQL, Power BI, JIRA</a:t>
+            </a:r>
+          </a:p>
+        </p:txBody>
+      </p:sp>
+      <p:sp>
+        <p:nvSpPr>
+          <p:cNvPr id="8" name="TextBox 7"/>
+          <p:cNvSpPr txBox="1"/>
+          <p:nvPr/>
+        </p:nvSpPr>
+        <p:spPr>
+          <a:xfrm>
+            <a:off x="4528600" y="1180000"/>
+            <a:ext cx="7434800" cy="5318000"/>
+          </a:xfrm>
+          <a:prstGeom prst="rect">
+            <a:avLst/>
+          </a:prstGeom>
+          <a:noFill/>
+        </p:spPr>
+        <p:txBody>
+          <a:bodyPr wrap="square" lIns="0" rIns="0" tIns="0" bIns="0">
+            <a:spAutoFit/>
+          </a:bodyPr>
+          <a:lstStyle/>
+          <a:p>
+            <a:pPr algn="l">
+              <a:spcAft>
+                <a:spcPts val="300"/>
+              </a:spcAft>
+            </a:pPr>
+            <a:r>
+              <a:rPr sz="1300" b="1" i="0">
+                <a:solidFill>
+                  <a:srgbClr val="3AEDE5"/>
+                </a:solidFill>
+                <a:latin typeface="Alegreya Sans"/>
+              </a:rPr>
+              <a:t>PRINCIPALES EXPÉRIENCES PROFESSIONNELLES (suite)</a:t>
+            </a:r>
+          </a:p>
+          <a:p>
+            <a:pPr algn="l">
+              <a:spcAft>
+                <a:spcPts val="100"/>
+              </a:spcAft>
+            </a:pPr>
+            <a:r>
+              <a:rPr sz="1200" b="1" i="0">
+                <a:solidFill>
+                  <a:srgbClr val="3AEDE5"/>
+                </a:solidFill>
+                <a:latin typeface="Alegreya Sans"/>
+              </a:rPr>
+              <a:t>▸ </a:t>
+            </a:r>
+            <a:r>
+              <a:rPr sz="1200" b="1" i="0">
+                <a:solidFill>
+                  <a:srgbClr val="FFFFFF"/>
+                </a:solidFill>
+                <a:latin typeface="Alegreya Sans"/>
+              </a:rPr>
+              <a:t>BNP Paribas Personal Finance — Transformation de la fonction Risk</a:t>
+            </a:r>
+            <a:r>
+              <a:rPr sz="1200" b="0" i="0">
+                <a:solidFill>
+                  <a:srgbClr val="FFFFFF"/>
+                </a:solidFill>
+                <a:latin typeface="Alegreya Sans"/>
+              </a:rPr>
+              <a:t> — PMO (EY)</a:t>
+            </a:r>
+            <a:r>
+              <a:rPr sz="1200" b="0" i="1">
+                <a:solidFill>
+                  <a:srgbClr val="3AEDE5"/>
+                </a:solidFill>
+                <a:latin typeface="Alegreya Sans"/>
+              </a:rPr>
+              <a:t>  (3 mois)</a:t>
+            </a:r>
+          </a:p>
+          <a:p>
+            <a:pPr algn="l" lvl="1">
+              <a:spcAft>
+                <a:spcPts val="100"/>
+              </a:spcAft>
+            </a:pPr>
+            <a:r>
+              <a:rPr sz="1200" b="1" i="0">
+                <a:solidFill>
+                  <a:srgbClr val="3AEDE5"/>
+                </a:solidFill>
+                <a:latin typeface="Alegreya Sans"/>
+              </a:rPr>
+              <a:t>•  </a:t>
+            </a:r>
+            <a:r>
+              <a:rPr sz="1200" b="0" i="0">
+                <a:solidFill>
+                  <a:srgbClr val="FFFFFF"/>
+                </a:solidFill>
+                <a:latin typeface="Alegreya Sans"/>
+              </a:rPr>
+              <a:t>Transformation du département Risk des entités de la région SUN (6 pays) conduisant à une réduction des coûts : analyse et simplification des macro-processus, alignement aux modèles d'exploitation cibles, revue des contrats avec les partenaires externes (fournisseurs de bases de données).</a:t>
+            </a:r>
+          </a:p>
+          <a:p>
+            <a:pPr algn="l">
+              <a:spcAft>
+                <a:spcPts val="100"/>
+              </a:spcAft>
+            </a:pPr>
+            <a:r>
+              <a:rPr sz="1200" b="1" i="0">
+                <a:solidFill>
+                  <a:srgbClr val="3AEDE5"/>
+                </a:solidFill>
+                <a:latin typeface="Alegreya Sans"/>
+              </a:rPr>
+              <a:t>▸ </a:t>
+            </a:r>
+            <a:r>
+              <a:rPr sz="1200" b="1" i="0">
+                <a:solidFill>
+                  <a:srgbClr val="FFFFFF"/>
+                </a:solidFill>
+                <a:latin typeface="Alegreya Sans"/>
+              </a:rPr>
+              <a:t>Crédit Agricole — Bâle IV &amp; CRR III</a:t>
+            </a:r>
+            <a:r>
+              <a:rPr sz="1200" b="0" i="0">
+                <a:solidFill>
+                  <a:srgbClr val="FFFFFF"/>
+                </a:solidFill>
+                <a:latin typeface="Alegreya Sans"/>
+              </a:rPr>
+              <a:t> — Formation réglementaire (EY)</a:t>
+            </a:r>
+            <a:r>
+              <a:rPr sz="1200" b="0" i="1">
+                <a:solidFill>
+                  <a:srgbClr val="3AEDE5"/>
+                </a:solidFill>
+                <a:latin typeface="Alegreya Sans"/>
+              </a:rPr>
+              <a:t>  (3 mois)</a:t>
+            </a:r>
+          </a:p>
+          <a:p>
+            <a:pPr algn="l" lvl="1">
+              <a:spcAft>
+                <a:spcPts val="100"/>
+              </a:spcAft>
+            </a:pPr>
+            <a:r>
+              <a:rPr sz="1200" b="1" i="0">
+                <a:solidFill>
+                  <a:srgbClr val="3AEDE5"/>
+                </a:solidFill>
+                <a:latin typeface="Alegreya Sans"/>
+              </a:rPr>
+              <a:t>•  </a:t>
+            </a:r>
+            <a:r>
+              <a:rPr sz="1200" b="0" i="0">
+                <a:solidFill>
+                  <a:srgbClr val="FFFFFF"/>
+                </a:solidFill>
+                <a:latin typeface="Alegreya Sans"/>
+              </a:rPr>
+              <a:t>Élaboration d'une formation sur les principes réglementaires et les évolutions apportées par les nouveaux cadres réglementaires, notamment Bâle IV / CRR 3.</a:t>
+            </a:r>
+          </a:p>
+          <a:p>
+            <a:pPr algn="l">
+              <a:spcBef>
+                <a:spcPts val="600"/>
+              </a:spcBef>
+              <a:spcAft>
+                <a:spcPts val="300"/>
+              </a:spcAft>
+            </a:pPr>
+            <a:r>
+              <a:rPr sz="1300" b="1" i="0">
+                <a:solidFill>
+                  <a:srgbClr val="3AEDE5"/>
+                </a:solidFill>
+                <a:latin typeface="Alegreya Sans"/>
+              </a:rPr>
+              <a:t>RÉFÉRENCES</a:t>
+            </a:r>
+          </a:p>
+          <a:p>
+            <a:pPr algn="l">
+              <a:spcAft>
+                <a:spcPts val="200"/>
+              </a:spcAft>
+            </a:pPr>
+            <a:r>
+              <a:rPr sz="1200" b="0" i="1">
+                <a:solidFill>
+                  <a:srgbClr val="FFFFFF"/>
+                </a:solidFill>
+                <a:latin typeface="Alegreya Sans"/>
+              </a:rPr>
+              <a:t>EY — Consultant Manager 2, gestion des Risques (2017-2024), Karat Advisory — Consultant indépendant (depuis 2024)</a:t>
+            </a:r>
+          </a:p>
+        </p:txBody>
+      </p:sp>
+      <p:sp>
+        <p:nvSpPr>
+          <p:cNvPr id="9" name="Rectangle 8"/>
+          <p:cNvSpPr/>
+          <p:nvPr/>
+        </p:nvSpPr>
+        <p:spPr>
+          <a:xfrm>
+            <a:off x="0" y="6578000"/>
+            <a:ext cx="12192000" cy="280000"/>
+          </a:xfrm>
+          <a:prstGeom prst="rect">
+            <a:avLst/>
+          </a:prstGeom>
+          <a:solidFill>
+            <a:srgbClr val="061A5E"/>
+          </a:solidFill>
+          <a:ln>
+            <a:noFill/>
+          </a:ln>
+          <a:effectLst/>
+        </p:spPr>
+        <p:style>
+          <a:lnRef idx="1">
+            <a:schemeClr val="accent1"/>
+          </a:lnRef>
+          <a:fillRef idx="3">
+            <a:schemeClr val="accent1"/>
+          </a:fillRef>
+          <a:effectRef idx="2">
+            <a:schemeClr val="accent1"/>
+          </a:effectRef>
+          <a:fontRef idx="minor">
+            <a:schemeClr val="lt1"/>
+          </a:fontRef>
+        </p:style>
+        <p:txBody>
+          <a:bodyPr rtlCol="0" anchor="ctr"/>
+          <a:lstStyle/>
+          <a:p>
+            <a:pPr algn="ctr"/>
+          </a:p>
+        </p:txBody>
+      </p:sp>
+      <p:sp>
+        <p:nvSpPr>
+          <p:cNvPr id="10" name="TextBox 9"/>
+          <p:cNvSpPr txBox="1"/>
+          <p:nvPr/>
+        </p:nvSpPr>
+        <p:spPr>
+          <a:xfrm>
+            <a:off x="228600" y="6578000"/>
+            <a:ext cx="11734800" cy="280000"/>
+          </a:xfrm>
+          <a:prstGeom prst="rect">
+            <a:avLst/>
+          </a:prstGeom>
+          <a:noFill/>
+        </p:spPr>
+        <p:txBody>
+          <a:bodyPr wrap="square" lIns="0" rIns="0" tIns="0" bIns="0">
+            <a:spAutoFit/>
+          </a:bodyPr>
+          <a:lstStyle/>
+          <a:p>
+            <a:pPr algn="ctr"/>
+            <a:r>
+              <a:rPr sz="1000" b="0" i="1">
+                <a:solidFill>
+                  <a:srgbClr val="CCD6E8"/>
+                </a:solidFill>
+                <a:latin typeface="Alegreya Sans"/>
+              </a:rPr>
+              <a:t>Les informations de ce document sont strictement confidentielles — Ce document ne peut être partagé qu'avec l'accord de son propriétaire</a:t>
             </a:r>
           </a:p>
         </p:txBody>

--- a/outputs/R.T._moa_risques_reglementaire.pptx
+++ b/outputs/R.T._moa_risques_reglementaire.pptx
@@ -3626,8 +3626,8 @@
         </p:nvSpPr>
         <p:spPr>
           <a:xfrm>
-            <a:off x="4528600" y="1180000"/>
-            <a:ext cx="7434800" cy="5318000"/>
+            <a:off x="4528600" y="1649900"/>
+            <a:ext cx="7434800" cy="4848100"/>
           </a:xfrm>
           <a:prstGeom prst="rect">
             <a:avLst/>
@@ -4382,6 +4382,130 @@
               <a:t>Outils : MS Office, VBA, SQL, Power BI, JIRA</a:t>
             </a:r>
           </a:p>
+          <a:p>
+            <a:pPr algn="l">
+              <a:spcBef>
+                <a:spcPts val="600"/>
+              </a:spcBef>
+              <a:spcAft>
+                <a:spcPts val="300"/>
+              </a:spcAft>
+            </a:pPr>
+            <a:r>
+              <a:rPr sz="1300" b="1" i="0">
+                <a:solidFill>
+                  <a:srgbClr val="3AEDE5"/>
+                </a:solidFill>
+                <a:latin typeface="Alegreya Sans"/>
+              </a:rPr>
+              <a:t>FORMATION &amp; CERTIFICATIONS</a:t>
+            </a:r>
+          </a:p>
+          <a:p>
+            <a:pPr algn="l">
+              <a:spcAft>
+                <a:spcPts val="100"/>
+              </a:spcAft>
+            </a:pPr>
+            <a:r>
+              <a:rPr sz="1200" b="1" i="0">
+                <a:solidFill>
+                  <a:srgbClr val="3AEDE5"/>
+                </a:solidFill>
+                <a:latin typeface="Alegreya Sans"/>
+              </a:rPr>
+              <a:t>2017  </a:t>
+            </a:r>
+            <a:r>
+              <a:rPr sz="1200" b="1" i="0">
+                <a:solidFill>
+                  <a:srgbClr val="FFFFFF"/>
+                </a:solidFill>
+                <a:latin typeface="Alegreya Sans"/>
+              </a:rPr>
+              <a:t>IGR-IAE — Institut de Gestion de Rennes</a:t>
+            </a:r>
+          </a:p>
+          <a:p>
+            <a:pPr algn="l">
+              <a:spcAft>
+                <a:spcPts val="300"/>
+              </a:spcAft>
+            </a:pPr>
+            <a:r>
+              <a:rPr sz="1200" b="0" i="1">
+                <a:solidFill>
+                  <a:srgbClr val="CCD6E8"/>
+                </a:solidFill>
+                <a:latin typeface="Alegreya Sans"/>
+              </a:rPr>
+              <a:t>M2 Audit &amp; Gestion des Risques (alternance)</a:t>
+            </a:r>
+          </a:p>
+          <a:p>
+            <a:pPr algn="l">
+              <a:spcAft>
+                <a:spcPts val="100"/>
+              </a:spcAft>
+            </a:pPr>
+            <a:r>
+              <a:rPr sz="1200" b="1" i="0">
+                <a:solidFill>
+                  <a:srgbClr val="FFFFFF"/>
+                </a:solidFill>
+                <a:latin typeface="Alegreya Sans"/>
+              </a:rPr>
+              <a:t>Spécialisation</a:t>
+            </a:r>
+          </a:p>
+          <a:p>
+            <a:pPr algn="l">
+              <a:spcAft>
+                <a:spcPts val="300"/>
+              </a:spcAft>
+            </a:pPr>
+            <a:r>
+              <a:rPr sz="1200" b="0" i="1">
+                <a:solidFill>
+                  <a:srgbClr val="CCD6E8"/>
+                </a:solidFill>
+                <a:latin typeface="Alegreya Sans"/>
+              </a:rPr>
+              <a:t>Risques de crédit, de marché et opérationnels, modélisation financière, gestion d'actifs et gestion bancaire</a:t>
+            </a:r>
+          </a:p>
+          <a:p>
+            <a:pPr algn="l">
+              <a:spcAft>
+                <a:spcPts val="100"/>
+              </a:spcAft>
+            </a:pPr>
+            <a:r>
+              <a:rPr sz="1200" b="1" i="0">
+                <a:solidFill>
+                  <a:srgbClr val="FFFFFF"/>
+                </a:solidFill>
+                <a:latin typeface="Alegreya Sans"/>
+              </a:rPr>
+              <a:t>Certifications</a:t>
+            </a:r>
+          </a:p>
+          <a:p>
+            <a:pPr algn="l">
+              <a:spcAft>
+                <a:spcPts val="300"/>
+              </a:spcAft>
+            </a:pPr>
+            <a:r>
+              <a:rPr sz="1200" b="0" i="1">
+                <a:solidFill>
+                  <a:srgbClr val="CCD6E8"/>
+                </a:solidFill>
+                <a:latin typeface="Alegreya Sans"/>
+              </a:rPr>
+              <a:t>AMF · BMC (Bloomberg Market Concepts)</a:t>
+            </a:r>
+          </a:p>
         </p:txBody>
       </p:sp>
       <p:sp>
@@ -4392,8 +4516,8 @@
         </p:nvSpPr>
         <p:spPr>
           <a:xfrm>
-            <a:off x="4528600" y="1180000"/>
-            <a:ext cx="7434800" cy="5318000"/>
+            <a:off x="4528600" y="1649900"/>
+            <a:ext cx="7434800" cy="4848100"/>
           </a:xfrm>
           <a:prstGeom prst="rect">
             <a:avLst/>
@@ -5206,6 +5330,130 @@
               <a:t>Outils : MS Office, VBA, SQL, Power BI, JIRA</a:t>
             </a:r>
           </a:p>
+          <a:p>
+            <a:pPr algn="l">
+              <a:spcBef>
+                <a:spcPts val="600"/>
+              </a:spcBef>
+              <a:spcAft>
+                <a:spcPts val="300"/>
+              </a:spcAft>
+            </a:pPr>
+            <a:r>
+              <a:rPr sz="1300" b="1" i="0">
+                <a:solidFill>
+                  <a:srgbClr val="3AEDE5"/>
+                </a:solidFill>
+                <a:latin typeface="Alegreya Sans"/>
+              </a:rPr>
+              <a:t>FORMATION &amp; CERTIFICATIONS</a:t>
+            </a:r>
+          </a:p>
+          <a:p>
+            <a:pPr algn="l">
+              <a:spcAft>
+                <a:spcPts val="100"/>
+              </a:spcAft>
+            </a:pPr>
+            <a:r>
+              <a:rPr sz="1200" b="1" i="0">
+                <a:solidFill>
+                  <a:srgbClr val="3AEDE5"/>
+                </a:solidFill>
+                <a:latin typeface="Alegreya Sans"/>
+              </a:rPr>
+              <a:t>2017  </a:t>
+            </a:r>
+            <a:r>
+              <a:rPr sz="1200" b="1" i="0">
+                <a:solidFill>
+                  <a:srgbClr val="FFFFFF"/>
+                </a:solidFill>
+                <a:latin typeface="Alegreya Sans"/>
+              </a:rPr>
+              <a:t>IGR-IAE — Institut de Gestion de Rennes</a:t>
+            </a:r>
+          </a:p>
+          <a:p>
+            <a:pPr algn="l">
+              <a:spcAft>
+                <a:spcPts val="300"/>
+              </a:spcAft>
+            </a:pPr>
+            <a:r>
+              <a:rPr sz="1200" b="0" i="1">
+                <a:solidFill>
+                  <a:srgbClr val="CCD6E8"/>
+                </a:solidFill>
+                <a:latin typeface="Alegreya Sans"/>
+              </a:rPr>
+              <a:t>M2 Audit &amp; Gestion des Risques (alternance)</a:t>
+            </a:r>
+          </a:p>
+          <a:p>
+            <a:pPr algn="l">
+              <a:spcAft>
+                <a:spcPts val="100"/>
+              </a:spcAft>
+            </a:pPr>
+            <a:r>
+              <a:rPr sz="1200" b="1" i="0">
+                <a:solidFill>
+                  <a:srgbClr val="FFFFFF"/>
+                </a:solidFill>
+                <a:latin typeface="Alegreya Sans"/>
+              </a:rPr>
+              <a:t>Spécialisation</a:t>
+            </a:r>
+          </a:p>
+          <a:p>
+            <a:pPr algn="l">
+              <a:spcAft>
+                <a:spcPts val="300"/>
+              </a:spcAft>
+            </a:pPr>
+            <a:r>
+              <a:rPr sz="1200" b="0" i="1">
+                <a:solidFill>
+                  <a:srgbClr val="CCD6E8"/>
+                </a:solidFill>
+                <a:latin typeface="Alegreya Sans"/>
+              </a:rPr>
+              <a:t>Risques de crédit, de marché et opérationnels, modélisation financière, gestion d'actifs et gestion bancaire</a:t>
+            </a:r>
+          </a:p>
+          <a:p>
+            <a:pPr algn="l">
+              <a:spcAft>
+                <a:spcPts val="100"/>
+              </a:spcAft>
+            </a:pPr>
+            <a:r>
+              <a:rPr sz="1200" b="1" i="0">
+                <a:solidFill>
+                  <a:srgbClr val="FFFFFF"/>
+                </a:solidFill>
+                <a:latin typeface="Alegreya Sans"/>
+              </a:rPr>
+              <a:t>Certifications</a:t>
+            </a:r>
+          </a:p>
+          <a:p>
+            <a:pPr algn="l">
+              <a:spcAft>
+                <a:spcPts val="300"/>
+              </a:spcAft>
+            </a:pPr>
+            <a:r>
+              <a:rPr sz="1200" b="0" i="1">
+                <a:solidFill>
+                  <a:srgbClr val="CCD6E8"/>
+                </a:solidFill>
+                <a:latin typeface="Alegreya Sans"/>
+              </a:rPr>
+              <a:t>AMF · BMC (Bloomberg Market Concepts)</a:t>
+            </a:r>
+          </a:p>
         </p:txBody>
       </p:sp>
       <p:sp>
@@ -5216,8 +5464,8 @@
         </p:nvSpPr>
         <p:spPr>
           <a:xfrm>
-            <a:off x="4528600" y="1180000"/>
-            <a:ext cx="7434800" cy="5318000"/>
+            <a:off x="4528600" y="1649900"/>
+            <a:ext cx="7434800" cy="4848100"/>
           </a:xfrm>
           <a:prstGeom prst="rect">
             <a:avLst/>
@@ -6055,6 +6303,130 @@
               <a:t>Outils : MS Office, VBA, SQL, Power BI, JIRA</a:t>
             </a:r>
           </a:p>
+          <a:p>
+            <a:pPr algn="l">
+              <a:spcBef>
+                <a:spcPts val="600"/>
+              </a:spcBef>
+              <a:spcAft>
+                <a:spcPts val="300"/>
+              </a:spcAft>
+            </a:pPr>
+            <a:r>
+              <a:rPr sz="1300" b="1" i="0">
+                <a:solidFill>
+                  <a:srgbClr val="3AEDE5"/>
+                </a:solidFill>
+                <a:latin typeface="Alegreya Sans"/>
+              </a:rPr>
+              <a:t>FORMATION &amp; CERTIFICATIONS</a:t>
+            </a:r>
+          </a:p>
+          <a:p>
+            <a:pPr algn="l">
+              <a:spcAft>
+                <a:spcPts val="100"/>
+              </a:spcAft>
+            </a:pPr>
+            <a:r>
+              <a:rPr sz="1200" b="1" i="0">
+                <a:solidFill>
+                  <a:srgbClr val="3AEDE5"/>
+                </a:solidFill>
+                <a:latin typeface="Alegreya Sans"/>
+              </a:rPr>
+              <a:t>2017  </a:t>
+            </a:r>
+            <a:r>
+              <a:rPr sz="1200" b="1" i="0">
+                <a:solidFill>
+                  <a:srgbClr val="FFFFFF"/>
+                </a:solidFill>
+                <a:latin typeface="Alegreya Sans"/>
+              </a:rPr>
+              <a:t>IGR-IAE — Institut de Gestion de Rennes</a:t>
+            </a:r>
+          </a:p>
+          <a:p>
+            <a:pPr algn="l">
+              <a:spcAft>
+                <a:spcPts val="300"/>
+              </a:spcAft>
+            </a:pPr>
+            <a:r>
+              <a:rPr sz="1200" b="0" i="1">
+                <a:solidFill>
+                  <a:srgbClr val="CCD6E8"/>
+                </a:solidFill>
+                <a:latin typeface="Alegreya Sans"/>
+              </a:rPr>
+              <a:t>M2 Audit &amp; Gestion des Risques (alternance)</a:t>
+            </a:r>
+          </a:p>
+          <a:p>
+            <a:pPr algn="l">
+              <a:spcAft>
+                <a:spcPts val="100"/>
+              </a:spcAft>
+            </a:pPr>
+            <a:r>
+              <a:rPr sz="1200" b="1" i="0">
+                <a:solidFill>
+                  <a:srgbClr val="FFFFFF"/>
+                </a:solidFill>
+                <a:latin typeface="Alegreya Sans"/>
+              </a:rPr>
+              <a:t>Spécialisation</a:t>
+            </a:r>
+          </a:p>
+          <a:p>
+            <a:pPr algn="l">
+              <a:spcAft>
+                <a:spcPts val="300"/>
+              </a:spcAft>
+            </a:pPr>
+            <a:r>
+              <a:rPr sz="1200" b="0" i="1">
+                <a:solidFill>
+                  <a:srgbClr val="CCD6E8"/>
+                </a:solidFill>
+                <a:latin typeface="Alegreya Sans"/>
+              </a:rPr>
+              <a:t>Risques de crédit, de marché et opérationnels, modélisation financière, gestion d'actifs et gestion bancaire</a:t>
+            </a:r>
+          </a:p>
+          <a:p>
+            <a:pPr algn="l">
+              <a:spcAft>
+                <a:spcPts val="100"/>
+              </a:spcAft>
+            </a:pPr>
+            <a:r>
+              <a:rPr sz="1200" b="1" i="0">
+                <a:solidFill>
+                  <a:srgbClr val="FFFFFF"/>
+                </a:solidFill>
+                <a:latin typeface="Alegreya Sans"/>
+              </a:rPr>
+              <a:t>Certifications</a:t>
+            </a:r>
+          </a:p>
+          <a:p>
+            <a:pPr algn="l">
+              <a:spcAft>
+                <a:spcPts val="300"/>
+              </a:spcAft>
+            </a:pPr>
+            <a:r>
+              <a:rPr sz="1200" b="0" i="1">
+                <a:solidFill>
+                  <a:srgbClr val="CCD6E8"/>
+                </a:solidFill>
+                <a:latin typeface="Alegreya Sans"/>
+              </a:rPr>
+              <a:t>AMF · BMC (Bloomberg Market Concepts)</a:t>
+            </a:r>
+          </a:p>
         </p:txBody>
       </p:sp>
       <p:sp>
@@ -6065,8 +6437,8 @@
         </p:nvSpPr>
         <p:spPr>
           <a:xfrm>
-            <a:off x="4528600" y="1180000"/>
-            <a:ext cx="7434800" cy="5318000"/>
+            <a:off x="4528600" y="1649900"/>
+            <a:ext cx="7434800" cy="4848100"/>
           </a:xfrm>
           <a:prstGeom prst="rect">
             <a:avLst/>
@@ -6854,6 +7226,130 @@
               <a:t>Outils : MS Office, VBA, SQL, Power BI, JIRA</a:t>
             </a:r>
           </a:p>
+          <a:p>
+            <a:pPr algn="l">
+              <a:spcBef>
+                <a:spcPts val="600"/>
+              </a:spcBef>
+              <a:spcAft>
+                <a:spcPts val="300"/>
+              </a:spcAft>
+            </a:pPr>
+            <a:r>
+              <a:rPr sz="1300" b="1" i="0">
+                <a:solidFill>
+                  <a:srgbClr val="3AEDE5"/>
+                </a:solidFill>
+                <a:latin typeface="Alegreya Sans"/>
+              </a:rPr>
+              <a:t>FORMATION &amp; CERTIFICATIONS</a:t>
+            </a:r>
+          </a:p>
+          <a:p>
+            <a:pPr algn="l">
+              <a:spcAft>
+                <a:spcPts val="100"/>
+              </a:spcAft>
+            </a:pPr>
+            <a:r>
+              <a:rPr sz="1200" b="1" i="0">
+                <a:solidFill>
+                  <a:srgbClr val="3AEDE5"/>
+                </a:solidFill>
+                <a:latin typeface="Alegreya Sans"/>
+              </a:rPr>
+              <a:t>2017  </a:t>
+            </a:r>
+            <a:r>
+              <a:rPr sz="1200" b="1" i="0">
+                <a:solidFill>
+                  <a:srgbClr val="FFFFFF"/>
+                </a:solidFill>
+                <a:latin typeface="Alegreya Sans"/>
+              </a:rPr>
+              <a:t>IGR-IAE — Institut de Gestion de Rennes</a:t>
+            </a:r>
+          </a:p>
+          <a:p>
+            <a:pPr algn="l">
+              <a:spcAft>
+                <a:spcPts val="300"/>
+              </a:spcAft>
+            </a:pPr>
+            <a:r>
+              <a:rPr sz="1200" b="0" i="1">
+                <a:solidFill>
+                  <a:srgbClr val="CCD6E8"/>
+                </a:solidFill>
+                <a:latin typeface="Alegreya Sans"/>
+              </a:rPr>
+              <a:t>M2 Audit &amp; Gestion des Risques (alternance)</a:t>
+            </a:r>
+          </a:p>
+          <a:p>
+            <a:pPr algn="l">
+              <a:spcAft>
+                <a:spcPts val="100"/>
+              </a:spcAft>
+            </a:pPr>
+            <a:r>
+              <a:rPr sz="1200" b="1" i="0">
+                <a:solidFill>
+                  <a:srgbClr val="FFFFFF"/>
+                </a:solidFill>
+                <a:latin typeface="Alegreya Sans"/>
+              </a:rPr>
+              <a:t>Spécialisation</a:t>
+            </a:r>
+          </a:p>
+          <a:p>
+            <a:pPr algn="l">
+              <a:spcAft>
+                <a:spcPts val="300"/>
+              </a:spcAft>
+            </a:pPr>
+            <a:r>
+              <a:rPr sz="1200" b="0" i="1">
+                <a:solidFill>
+                  <a:srgbClr val="CCD6E8"/>
+                </a:solidFill>
+                <a:latin typeface="Alegreya Sans"/>
+              </a:rPr>
+              <a:t>Risques de crédit, de marché et opérationnels, modélisation financière, gestion d'actifs et gestion bancaire</a:t>
+            </a:r>
+          </a:p>
+          <a:p>
+            <a:pPr algn="l">
+              <a:spcAft>
+                <a:spcPts val="100"/>
+              </a:spcAft>
+            </a:pPr>
+            <a:r>
+              <a:rPr sz="1200" b="1" i="0">
+                <a:solidFill>
+                  <a:srgbClr val="FFFFFF"/>
+                </a:solidFill>
+                <a:latin typeface="Alegreya Sans"/>
+              </a:rPr>
+              <a:t>Certifications</a:t>
+            </a:r>
+          </a:p>
+          <a:p>
+            <a:pPr algn="l">
+              <a:spcAft>
+                <a:spcPts val="300"/>
+              </a:spcAft>
+            </a:pPr>
+            <a:r>
+              <a:rPr sz="1200" b="0" i="1">
+                <a:solidFill>
+                  <a:srgbClr val="CCD6E8"/>
+                </a:solidFill>
+                <a:latin typeface="Alegreya Sans"/>
+              </a:rPr>
+              <a:t>AMF · BMC (Bloomberg Market Concepts)</a:t>
+            </a:r>
+          </a:p>
         </p:txBody>
       </p:sp>
       <p:sp>
@@ -6864,8 +7360,8 @@
         </p:nvSpPr>
         <p:spPr>
           <a:xfrm>
-            <a:off x="4528600" y="1180000"/>
-            <a:ext cx="7434800" cy="5318000"/>
+            <a:off x="4528600" y="1649900"/>
+            <a:ext cx="7434800" cy="4848100"/>
           </a:xfrm>
           <a:prstGeom prst="rect">
             <a:avLst/>
